--- a/411121307_report.pptx
+++ b/411121307_report.pptx
@@ -3481,9 +3481,62 @@
           <a:p>
             <a:pPr lvl="1"/>
             <a:r>
-              <a:rPr kumimoji="1" lang="zh-TW" altLang="en-US"/>
-              <a:t>當市場行情好時（程式預設）</a:t>
-            </a:r>
+              <a:rPr kumimoji="1" lang="zh-TW" altLang="en-US" dirty="0"/>
+              <a:t>當市場行情好時</a:t>
+            </a:r>
+            <a:r>
+              <a:rPr kumimoji="1" lang="en-US" altLang="zh-TW" dirty="0"/>
+              <a:t> (market &gt; 800 BULL)</a:t>
+            </a:r>
+            <a:r>
+              <a:rPr kumimoji="1" lang="zh-TW" altLang="en-US" dirty="0"/>
+              <a:t>，資金將</a:t>
+            </a:r>
+            <a:r>
+              <a:rPr kumimoji="1" lang="en-US" altLang="zh-TW" dirty="0"/>
+              <a:t>100%</a:t>
+            </a:r>
+            <a:r>
+              <a:rPr kumimoji="1" lang="zh-TW" altLang="en-US" dirty="0"/>
+              <a:t>存入虛擬貨幣中。</a:t>
+            </a:r>
+            <a:endParaRPr kumimoji="1" lang="en-US" altLang="zh-TW" dirty="0"/>
+          </a:p>
+          <a:p>
+            <a:pPr lvl="1"/>
+            <a:r>
+              <a:rPr kumimoji="1" lang="zh-TW" altLang="en-US" dirty="0"/>
+              <a:t>當市場保守時</a:t>
+            </a:r>
+            <a:r>
+              <a:rPr kumimoji="1" lang="en-US" altLang="zh-TW" dirty="0"/>
+              <a:t> ( 501 &lt; market &lt; 799</a:t>
+            </a:r>
+            <a:r>
+              <a:rPr kumimoji="1" lang="zh-TW" altLang="en-US" dirty="0"/>
+              <a:t> </a:t>
+            </a:r>
+            <a:r>
+              <a:rPr kumimoji="1" lang="en-US" altLang="zh-TW" dirty="0"/>
+              <a:t>BEAR )</a:t>
+            </a:r>
+            <a:r>
+              <a:rPr kumimoji="1" lang="zh-TW" altLang="en-US" dirty="0"/>
+              <a:t>，資金將</a:t>
+            </a:r>
+            <a:r>
+              <a:rPr kumimoji="1" lang="en-US" altLang="zh-TW" dirty="0"/>
+              <a:t>80%</a:t>
+            </a:r>
+            <a:r>
+              <a:rPr kumimoji="1" lang="zh-TW" altLang="en-US" dirty="0"/>
+              <a:t>存入虛擬貨幣</a:t>
+            </a:r>
+            <a:r>
+              <a:rPr kumimoji="1" lang="zh-TW" altLang="en-US"/>
+              <a:t>中，避免</a:t>
+            </a:r>
+            <a:endParaRPr kumimoji="1" lang="en-US" altLang="zh-TW" dirty="0"/>
           </a:p>
         </p:txBody>
       </p:sp>

--- a/411121307_report.pptx
+++ b/411121307_report.pptx
@@ -7,6 +7,21 @@
   <p:sldIdLst>
     <p:sldId id="256" r:id="rId2"/>
     <p:sldId id="257" r:id="rId3"/>
+    <p:sldId id="258" r:id="rId4"/>
+    <p:sldId id="259" r:id="rId5"/>
+    <p:sldId id="260" r:id="rId6"/>
+    <p:sldId id="261" r:id="rId7"/>
+    <p:sldId id="262" r:id="rId8"/>
+    <p:sldId id="263" r:id="rId9"/>
+    <p:sldId id="264" r:id="rId10"/>
+    <p:sldId id="265" r:id="rId11"/>
+    <p:sldId id="266" r:id="rId12"/>
+    <p:sldId id="267" r:id="rId13"/>
+    <p:sldId id="268" r:id="rId14"/>
+    <p:sldId id="269" r:id="rId15"/>
+    <p:sldId id="270" r:id="rId16"/>
+    <p:sldId id="271" r:id="rId17"/>
+    <p:sldId id="272" r:id="rId18"/>
   </p:sldIdLst>
   <p:sldSz cx="12192000" cy="6858000"/>
   <p:notesSz cx="6858000" cy="9144000"/>
@@ -105,6 +120,11 @@
       </a:defRPr>
     </a:lvl9pPr>
   </p:defaultTextStyle>
+  <p:extLst>
+    <p:ext uri="{EFAFB233-063F-42B5-8137-9DF3F51BA10A}">
+      <p15:sldGuideLst xmlns:p15="http://schemas.microsoft.com/office/powerpoint/2012/main"/>
+    </p:ext>
+  </p:extLst>
 </p:presentation>
 </file>
 
@@ -255,7 +275,7 @@
           <a:p>
             <a:fld id="{42FD94D0-827B-3E44-A20B-858EE60AABC8}" type="datetimeFigureOut">
               <a:rPr kumimoji="1" lang="zh-TW" altLang="en-US" smtClean="0"/>
-              <a:t>2026/6/16</a:t>
+              <a:t>2026/6/17</a:t>
             </a:fld>
             <a:endParaRPr kumimoji="1" lang="zh-TW" altLang="en-US"/>
           </a:p>
@@ -453,7 +473,7 @@
           <a:p>
             <a:fld id="{42FD94D0-827B-3E44-A20B-858EE60AABC8}" type="datetimeFigureOut">
               <a:rPr kumimoji="1" lang="zh-TW" altLang="en-US" smtClean="0"/>
-              <a:t>2026/6/16</a:t>
+              <a:t>2026/6/17</a:t>
             </a:fld>
             <a:endParaRPr kumimoji="1" lang="zh-TW" altLang="en-US"/>
           </a:p>
@@ -661,7 +681,7 @@
           <a:p>
             <a:fld id="{42FD94D0-827B-3E44-A20B-858EE60AABC8}" type="datetimeFigureOut">
               <a:rPr kumimoji="1" lang="zh-TW" altLang="en-US" smtClean="0"/>
-              <a:t>2026/6/16</a:t>
+              <a:t>2026/6/17</a:t>
             </a:fld>
             <a:endParaRPr kumimoji="1" lang="zh-TW" altLang="en-US"/>
           </a:p>
@@ -859,7 +879,7 @@
           <a:p>
             <a:fld id="{42FD94D0-827B-3E44-A20B-858EE60AABC8}" type="datetimeFigureOut">
               <a:rPr kumimoji="1" lang="zh-TW" altLang="en-US" smtClean="0"/>
-              <a:t>2026/6/16</a:t>
+              <a:t>2026/6/17</a:t>
             </a:fld>
             <a:endParaRPr kumimoji="1" lang="zh-TW" altLang="en-US"/>
           </a:p>
@@ -1134,7 +1154,7 @@
           <a:p>
             <a:fld id="{42FD94D0-827B-3E44-A20B-858EE60AABC8}" type="datetimeFigureOut">
               <a:rPr kumimoji="1" lang="zh-TW" altLang="en-US" smtClean="0"/>
-              <a:t>2026/6/16</a:t>
+              <a:t>2026/6/17</a:t>
             </a:fld>
             <a:endParaRPr kumimoji="1" lang="zh-TW" altLang="en-US"/>
           </a:p>
@@ -1399,7 +1419,7 @@
           <a:p>
             <a:fld id="{42FD94D0-827B-3E44-A20B-858EE60AABC8}" type="datetimeFigureOut">
               <a:rPr kumimoji="1" lang="zh-TW" altLang="en-US" smtClean="0"/>
-              <a:t>2026/6/16</a:t>
+              <a:t>2026/6/17</a:t>
             </a:fld>
             <a:endParaRPr kumimoji="1" lang="zh-TW" altLang="en-US"/>
           </a:p>
@@ -1811,7 +1831,7 @@
           <a:p>
             <a:fld id="{42FD94D0-827B-3E44-A20B-858EE60AABC8}" type="datetimeFigureOut">
               <a:rPr kumimoji="1" lang="zh-TW" altLang="en-US" smtClean="0"/>
-              <a:t>2026/6/16</a:t>
+              <a:t>2026/6/17</a:t>
             </a:fld>
             <a:endParaRPr kumimoji="1" lang="zh-TW" altLang="en-US"/>
           </a:p>
@@ -1952,7 +1972,7 @@
           <a:p>
             <a:fld id="{42FD94D0-827B-3E44-A20B-858EE60AABC8}" type="datetimeFigureOut">
               <a:rPr kumimoji="1" lang="zh-TW" altLang="en-US" smtClean="0"/>
-              <a:t>2026/6/16</a:t>
+              <a:t>2026/6/17</a:t>
             </a:fld>
             <a:endParaRPr kumimoji="1" lang="zh-TW" altLang="en-US"/>
           </a:p>
@@ -2065,7 +2085,7 @@
           <a:p>
             <a:fld id="{42FD94D0-827B-3E44-A20B-858EE60AABC8}" type="datetimeFigureOut">
               <a:rPr kumimoji="1" lang="zh-TW" altLang="en-US" smtClean="0"/>
-              <a:t>2026/6/16</a:t>
+              <a:t>2026/6/17</a:t>
             </a:fld>
             <a:endParaRPr kumimoji="1" lang="zh-TW" altLang="en-US"/>
           </a:p>
@@ -2376,7 +2396,7 @@
           <a:p>
             <a:fld id="{42FD94D0-827B-3E44-A20B-858EE60AABC8}" type="datetimeFigureOut">
               <a:rPr kumimoji="1" lang="zh-TW" altLang="en-US" smtClean="0"/>
-              <a:t>2026/6/16</a:t>
+              <a:t>2026/6/17</a:t>
             </a:fld>
             <a:endParaRPr kumimoji="1" lang="zh-TW" altLang="en-US"/>
           </a:p>
@@ -2664,7 +2684,7 @@
           <a:p>
             <a:fld id="{42FD94D0-827B-3E44-A20B-858EE60AABC8}" type="datetimeFigureOut">
               <a:rPr kumimoji="1" lang="zh-TW" altLang="en-US" smtClean="0"/>
-              <a:t>2026/6/16</a:t>
+              <a:t>2026/6/17</a:t>
             </a:fld>
             <a:endParaRPr kumimoji="1" lang="zh-TW" altLang="en-US"/>
           </a:p>
@@ -2905,7 +2925,7 @@
           <a:p>
             <a:fld id="{42FD94D0-827B-3E44-A20B-858EE60AABC8}" type="datetimeFigureOut">
               <a:rPr kumimoji="1" lang="zh-TW" altLang="en-US" smtClean="0"/>
-              <a:t>2026/6/16</a:t>
+              <a:t>2026/6/17</a:t>
             </a:fld>
             <a:endParaRPr kumimoji="1" lang="zh-TW" altLang="en-US"/>
           </a:p>
@@ -3405,6 +3425,1193 @@
 </p:sld>
 </file>
 
+<file path=ppt/slides/slide10.xml><?xml version="1.0" encoding="utf-8"?>
+<p:sld xmlns:a="http://schemas.openxmlformats.org/drawingml/2006/main" xmlns:r="http://schemas.openxmlformats.org/officeDocument/2006/relationships" xmlns:p="http://schemas.openxmlformats.org/presentationml/2006/main">
+  <p:cSld>
+    <p:spTree>
+      <p:nvGrpSpPr>
+        <p:cNvPr id="1" name=""/>
+        <p:cNvGrpSpPr/>
+        <p:nvPr/>
+      </p:nvGrpSpPr>
+      <p:grpSpPr>
+        <a:xfrm>
+          <a:off x="0" y="0"/>
+          <a:ext cx="0" cy="0"/>
+          <a:chOff x="0" y="0"/>
+          <a:chExt cx="0" cy="0"/>
+        </a:xfrm>
+      </p:grpSpPr>
+      <p:sp>
+        <p:nvSpPr>
+          <p:cNvPr id="2" name="標題 1">
+            <a:extLst>
+              <a:ext uri="{FF2B5EF4-FFF2-40B4-BE49-F238E27FC236}">
+                <a16:creationId xmlns:a16="http://schemas.microsoft.com/office/drawing/2014/main" id="{11ED216D-EF6C-21E6-E9DC-74591DC0EE2B}"/>
+              </a:ext>
+            </a:extLst>
+          </p:cNvPr>
+          <p:cNvSpPr>
+            <a:spLocks noGrp="1"/>
+          </p:cNvSpPr>
+          <p:nvPr>
+            <p:ph type="title"/>
+          </p:nvPr>
+        </p:nvSpPr>
+        <p:spPr/>
+        <p:txBody>
+          <a:bodyPr/>
+          <a:lstStyle/>
+          <a:p>
+            <a:r>
+              <a:rPr kumimoji="1" lang="en-US" altLang="zh-TW" dirty="0"/>
+              <a:t>Snapshot of all step: Deposit 100$</a:t>
+            </a:r>
+            <a:endParaRPr kumimoji="1" lang="zh-TW" altLang="en-US" dirty="0"/>
+          </a:p>
+        </p:txBody>
+      </p:sp>
+      <p:sp>
+        <p:nvSpPr>
+          <p:cNvPr id="3" name="內容版面配置區 2">
+            <a:extLst>
+              <a:ext uri="{FF2B5EF4-FFF2-40B4-BE49-F238E27FC236}">
+                <a16:creationId xmlns:a16="http://schemas.microsoft.com/office/drawing/2014/main" id="{80569C75-7122-E323-B817-76BB53EBC906}"/>
+              </a:ext>
+            </a:extLst>
+          </p:cNvPr>
+          <p:cNvSpPr>
+            <a:spLocks noGrp="1"/>
+          </p:cNvSpPr>
+          <p:nvPr>
+            <p:ph idx="1"/>
+          </p:nvPr>
+        </p:nvSpPr>
+        <p:spPr>
+          <a:xfrm>
+            <a:off x="838200" y="1538544"/>
+            <a:ext cx="10515600" cy="4351338"/>
+          </a:xfrm>
+        </p:spPr>
+        <p:txBody>
+          <a:bodyPr/>
+          <a:lstStyle/>
+          <a:p>
+            <a:r>
+              <a:rPr kumimoji="1" lang="en-US" altLang="zh-TW" dirty="0"/>
+              <a:t>Market state: BULL, save 100% in account.</a:t>
+            </a:r>
+          </a:p>
+        </p:txBody>
+      </p:sp>
+      <p:pic>
+        <p:nvPicPr>
+          <p:cNvPr id="7" name="圖片 6">
+            <a:extLst>
+              <a:ext uri="{FF2B5EF4-FFF2-40B4-BE49-F238E27FC236}">
+                <a16:creationId xmlns:a16="http://schemas.microsoft.com/office/drawing/2014/main" id="{42CC5F8E-9734-A0BD-15CB-8E3F0B8B87AD}"/>
+              </a:ext>
+            </a:extLst>
+          </p:cNvPr>
+          <p:cNvPicPr>
+            <a:picLocks noChangeAspect="1"/>
+          </p:cNvPicPr>
+          <p:nvPr/>
+        </p:nvPicPr>
+        <p:blipFill>
+          <a:blip r:embed="rId2"/>
+          <a:stretch>
+            <a:fillRect/>
+          </a:stretch>
+        </p:blipFill>
+        <p:spPr>
+          <a:xfrm>
+            <a:off x="1040219" y="2059135"/>
+            <a:ext cx="8273902" cy="4531468"/>
+          </a:xfrm>
+          <a:prstGeom prst="rect">
+            <a:avLst/>
+          </a:prstGeom>
+        </p:spPr>
+      </p:pic>
+    </p:spTree>
+    <p:extLst>
+      <p:ext uri="{BB962C8B-B14F-4D97-AF65-F5344CB8AC3E}">
+        <p14:creationId xmlns:p14="http://schemas.microsoft.com/office/powerpoint/2010/main" val="2312655101"/>
+      </p:ext>
+    </p:extLst>
+  </p:cSld>
+  <p:clrMapOvr>
+    <a:masterClrMapping/>
+  </p:clrMapOvr>
+</p:sld>
+</file>
+
+<file path=ppt/slides/slide11.xml><?xml version="1.0" encoding="utf-8"?>
+<p:sld xmlns:a="http://schemas.openxmlformats.org/drawingml/2006/main" xmlns:r="http://schemas.openxmlformats.org/officeDocument/2006/relationships" xmlns:p="http://schemas.openxmlformats.org/presentationml/2006/main">
+  <p:cSld>
+    <p:spTree>
+      <p:nvGrpSpPr>
+        <p:cNvPr id="1" name="">
+          <a:extLst>
+            <a:ext uri="{FF2B5EF4-FFF2-40B4-BE49-F238E27FC236}">
+              <a16:creationId xmlns:a16="http://schemas.microsoft.com/office/drawing/2014/main" id="{52530E7D-9995-FA05-4EA8-ECDF31E58AAF}"/>
+            </a:ext>
+          </a:extLst>
+        </p:cNvPr>
+        <p:cNvGrpSpPr/>
+        <p:nvPr/>
+      </p:nvGrpSpPr>
+      <p:grpSpPr>
+        <a:xfrm>
+          <a:off x="0" y="0"/>
+          <a:ext cx="0" cy="0"/>
+          <a:chOff x="0" y="0"/>
+          <a:chExt cx="0" cy="0"/>
+        </a:xfrm>
+      </p:grpSpPr>
+      <p:sp>
+        <p:nvSpPr>
+          <p:cNvPr id="2" name="標題 1">
+            <a:extLst>
+              <a:ext uri="{FF2B5EF4-FFF2-40B4-BE49-F238E27FC236}">
+                <a16:creationId xmlns:a16="http://schemas.microsoft.com/office/drawing/2014/main" id="{A79465D9-3E0A-FB09-1CC4-082CFAB8643C}"/>
+              </a:ext>
+            </a:extLst>
+          </p:cNvPr>
+          <p:cNvSpPr>
+            <a:spLocks noGrp="1"/>
+          </p:cNvSpPr>
+          <p:nvPr>
+            <p:ph type="title"/>
+          </p:nvPr>
+        </p:nvSpPr>
+        <p:spPr/>
+        <p:txBody>
+          <a:bodyPr/>
+          <a:lstStyle/>
+          <a:p>
+            <a:r>
+              <a:rPr kumimoji="1" lang="en-US" altLang="zh-TW" dirty="0"/>
+              <a:t>Snapshot of all step: Deposit 100$ cont. </a:t>
+            </a:r>
+            <a:endParaRPr kumimoji="1" lang="zh-TW" altLang="en-US" dirty="0"/>
+          </a:p>
+        </p:txBody>
+      </p:sp>
+      <p:sp>
+        <p:nvSpPr>
+          <p:cNvPr id="3" name="內容版面配置區 2">
+            <a:extLst>
+              <a:ext uri="{FF2B5EF4-FFF2-40B4-BE49-F238E27FC236}">
+                <a16:creationId xmlns:a16="http://schemas.microsoft.com/office/drawing/2014/main" id="{A7A98331-A469-2577-61C2-34CFDEE8D0A2}"/>
+              </a:ext>
+            </a:extLst>
+          </p:cNvPr>
+          <p:cNvSpPr>
+            <a:spLocks noGrp="1"/>
+          </p:cNvSpPr>
+          <p:nvPr>
+            <p:ph idx="1"/>
+          </p:nvPr>
+        </p:nvSpPr>
+        <p:spPr>
+          <a:xfrm>
+            <a:off x="838200" y="1538544"/>
+            <a:ext cx="10515600" cy="4351338"/>
+          </a:xfrm>
+        </p:spPr>
+        <p:txBody>
+          <a:bodyPr/>
+          <a:lstStyle/>
+          <a:p>
+            <a:r>
+              <a:rPr kumimoji="1" lang="en-US" altLang="zh-TW" dirty="0"/>
+              <a:t>Market state: BEAR, save 80% in account.</a:t>
+            </a:r>
+          </a:p>
+        </p:txBody>
+      </p:sp>
+      <p:pic>
+        <p:nvPicPr>
+          <p:cNvPr id="5" name="圖片 4">
+            <a:extLst>
+              <a:ext uri="{FF2B5EF4-FFF2-40B4-BE49-F238E27FC236}">
+                <a16:creationId xmlns:a16="http://schemas.microsoft.com/office/drawing/2014/main" id="{14643EB8-C98B-5DD1-BE4C-D54DC7F09E90}"/>
+              </a:ext>
+            </a:extLst>
+          </p:cNvPr>
+          <p:cNvPicPr>
+            <a:picLocks noChangeAspect="1"/>
+          </p:cNvPicPr>
+          <p:nvPr/>
+        </p:nvPicPr>
+        <p:blipFill>
+          <a:blip r:embed="rId2"/>
+          <a:stretch>
+            <a:fillRect/>
+          </a:stretch>
+        </p:blipFill>
+        <p:spPr>
+          <a:xfrm>
+            <a:off x="1105785" y="2011918"/>
+            <a:ext cx="8442252" cy="4620610"/>
+          </a:xfrm>
+          <a:prstGeom prst="rect">
+            <a:avLst/>
+          </a:prstGeom>
+        </p:spPr>
+      </p:pic>
+    </p:spTree>
+    <p:extLst>
+      <p:ext uri="{BB962C8B-B14F-4D97-AF65-F5344CB8AC3E}">
+        <p14:creationId xmlns:p14="http://schemas.microsoft.com/office/powerpoint/2010/main" val="2918298559"/>
+      </p:ext>
+    </p:extLst>
+  </p:cSld>
+  <p:clrMapOvr>
+    <a:masterClrMapping/>
+  </p:clrMapOvr>
+</p:sld>
+</file>
+
+<file path=ppt/slides/slide12.xml><?xml version="1.0" encoding="utf-8"?>
+<p:sld xmlns:a="http://schemas.openxmlformats.org/drawingml/2006/main" xmlns:r="http://schemas.openxmlformats.org/officeDocument/2006/relationships" xmlns:p="http://schemas.openxmlformats.org/presentationml/2006/main">
+  <p:cSld>
+    <p:spTree>
+      <p:nvGrpSpPr>
+        <p:cNvPr id="1" name="">
+          <a:extLst>
+            <a:ext uri="{FF2B5EF4-FFF2-40B4-BE49-F238E27FC236}">
+              <a16:creationId xmlns:a16="http://schemas.microsoft.com/office/drawing/2014/main" id="{3B8424FF-9E82-FF1C-5769-1311DC94FD83}"/>
+            </a:ext>
+          </a:extLst>
+        </p:cNvPr>
+        <p:cNvGrpSpPr/>
+        <p:nvPr/>
+      </p:nvGrpSpPr>
+      <p:grpSpPr>
+        <a:xfrm>
+          <a:off x="0" y="0"/>
+          <a:ext cx="0" cy="0"/>
+          <a:chOff x="0" y="0"/>
+          <a:chExt cx="0" cy="0"/>
+        </a:xfrm>
+      </p:grpSpPr>
+      <p:sp>
+        <p:nvSpPr>
+          <p:cNvPr id="2" name="標題 1">
+            <a:extLst>
+              <a:ext uri="{FF2B5EF4-FFF2-40B4-BE49-F238E27FC236}">
+                <a16:creationId xmlns:a16="http://schemas.microsoft.com/office/drawing/2014/main" id="{8E32CC80-3807-E25A-F1F7-7CDD996D5D5C}"/>
+              </a:ext>
+            </a:extLst>
+          </p:cNvPr>
+          <p:cNvSpPr>
+            <a:spLocks noGrp="1"/>
+          </p:cNvSpPr>
+          <p:nvPr>
+            <p:ph type="title"/>
+          </p:nvPr>
+        </p:nvSpPr>
+        <p:spPr/>
+        <p:txBody>
+          <a:bodyPr/>
+          <a:lstStyle/>
+          <a:p>
+            <a:r>
+              <a:rPr kumimoji="1" lang="en-US" altLang="zh-TW" dirty="0"/>
+              <a:t>Snapshot of all step: Withdraw within 3 days</a:t>
+            </a:r>
+            <a:endParaRPr kumimoji="1" lang="zh-TW" altLang="en-US" dirty="0"/>
+          </a:p>
+        </p:txBody>
+      </p:sp>
+      <p:sp>
+        <p:nvSpPr>
+          <p:cNvPr id="3" name="內容版面配置區 2">
+            <a:extLst>
+              <a:ext uri="{FF2B5EF4-FFF2-40B4-BE49-F238E27FC236}">
+                <a16:creationId xmlns:a16="http://schemas.microsoft.com/office/drawing/2014/main" id="{0F4F0A88-B7F0-BBD1-CD5B-90C1B5809F5A}"/>
+              </a:ext>
+            </a:extLst>
+          </p:cNvPr>
+          <p:cNvSpPr>
+            <a:spLocks noGrp="1"/>
+          </p:cNvSpPr>
+          <p:nvPr>
+            <p:ph idx="1"/>
+          </p:nvPr>
+        </p:nvSpPr>
+        <p:spPr>
+          <a:xfrm>
+            <a:off x="838200" y="1538544"/>
+            <a:ext cx="10515600" cy="4351338"/>
+          </a:xfrm>
+        </p:spPr>
+        <p:txBody>
+          <a:bodyPr/>
+          <a:lstStyle/>
+          <a:p>
+            <a:r>
+              <a:rPr kumimoji="1" lang="en-US" altLang="zh-TW" dirty="0"/>
+              <a:t>Withdraw within 3 days with penalty: before withdraw</a:t>
+            </a:r>
+          </a:p>
+        </p:txBody>
+      </p:sp>
+      <p:pic>
+        <p:nvPicPr>
+          <p:cNvPr id="8" name="圖片 7">
+            <a:extLst>
+              <a:ext uri="{FF2B5EF4-FFF2-40B4-BE49-F238E27FC236}">
+                <a16:creationId xmlns:a16="http://schemas.microsoft.com/office/drawing/2014/main" id="{CEF3D721-BEC8-2EC2-D5BF-E585C9F72396}"/>
+              </a:ext>
+            </a:extLst>
+          </p:cNvPr>
+          <p:cNvPicPr>
+            <a:picLocks noChangeAspect="1"/>
+          </p:cNvPicPr>
+          <p:nvPr/>
+        </p:nvPicPr>
+        <p:blipFill>
+          <a:blip r:embed="rId2"/>
+          <a:stretch>
+            <a:fillRect/>
+          </a:stretch>
+        </p:blipFill>
+        <p:spPr>
+          <a:xfrm>
+            <a:off x="1140611" y="2004266"/>
+            <a:ext cx="8332998" cy="4722526"/>
+          </a:xfrm>
+          <a:prstGeom prst="rect">
+            <a:avLst/>
+          </a:prstGeom>
+        </p:spPr>
+      </p:pic>
+    </p:spTree>
+    <p:extLst>
+      <p:ext uri="{BB962C8B-B14F-4D97-AF65-F5344CB8AC3E}">
+        <p14:creationId xmlns:p14="http://schemas.microsoft.com/office/powerpoint/2010/main" val="3820021008"/>
+      </p:ext>
+    </p:extLst>
+  </p:cSld>
+  <p:clrMapOvr>
+    <a:masterClrMapping/>
+  </p:clrMapOvr>
+</p:sld>
+</file>
+
+<file path=ppt/slides/slide13.xml><?xml version="1.0" encoding="utf-8"?>
+<p:sld xmlns:a="http://schemas.openxmlformats.org/drawingml/2006/main" xmlns:r="http://schemas.openxmlformats.org/officeDocument/2006/relationships" xmlns:p="http://schemas.openxmlformats.org/presentationml/2006/main">
+  <p:cSld>
+    <p:spTree>
+      <p:nvGrpSpPr>
+        <p:cNvPr id="1" name="">
+          <a:extLst>
+            <a:ext uri="{FF2B5EF4-FFF2-40B4-BE49-F238E27FC236}">
+              <a16:creationId xmlns:a16="http://schemas.microsoft.com/office/drawing/2014/main" id="{09D1EDB4-48E6-2329-C687-C99DB3D357B5}"/>
+            </a:ext>
+          </a:extLst>
+        </p:cNvPr>
+        <p:cNvGrpSpPr/>
+        <p:nvPr/>
+      </p:nvGrpSpPr>
+      <p:grpSpPr>
+        <a:xfrm>
+          <a:off x="0" y="0"/>
+          <a:ext cx="0" cy="0"/>
+          <a:chOff x="0" y="0"/>
+          <a:chExt cx="0" cy="0"/>
+        </a:xfrm>
+      </p:grpSpPr>
+      <p:sp>
+        <p:nvSpPr>
+          <p:cNvPr id="2" name="標題 1">
+            <a:extLst>
+              <a:ext uri="{FF2B5EF4-FFF2-40B4-BE49-F238E27FC236}">
+                <a16:creationId xmlns:a16="http://schemas.microsoft.com/office/drawing/2014/main" id="{F9CA8E91-75CA-637C-204C-E13FCF11A8DA}"/>
+              </a:ext>
+            </a:extLst>
+          </p:cNvPr>
+          <p:cNvSpPr>
+            <a:spLocks noGrp="1"/>
+          </p:cNvSpPr>
+          <p:nvPr>
+            <p:ph type="title"/>
+          </p:nvPr>
+        </p:nvSpPr>
+        <p:spPr/>
+        <p:txBody>
+          <a:bodyPr>
+            <a:normAutofit/>
+          </a:bodyPr>
+          <a:lstStyle/>
+          <a:p>
+            <a:r>
+              <a:rPr kumimoji="1" lang="en-US" altLang="zh-TW" sz="4000" dirty="0"/>
+              <a:t>Snapshot of all step: Withdraw within 3 days cont.</a:t>
+            </a:r>
+            <a:endParaRPr kumimoji="1" lang="zh-TW" altLang="en-US" sz="4000" dirty="0"/>
+          </a:p>
+        </p:txBody>
+      </p:sp>
+      <p:sp>
+        <p:nvSpPr>
+          <p:cNvPr id="3" name="內容版面配置區 2">
+            <a:extLst>
+              <a:ext uri="{FF2B5EF4-FFF2-40B4-BE49-F238E27FC236}">
+                <a16:creationId xmlns:a16="http://schemas.microsoft.com/office/drawing/2014/main" id="{5C7849C3-15A6-B6C3-196F-CC3115CAF087}"/>
+              </a:ext>
+            </a:extLst>
+          </p:cNvPr>
+          <p:cNvSpPr>
+            <a:spLocks noGrp="1"/>
+          </p:cNvSpPr>
+          <p:nvPr>
+            <p:ph idx="1"/>
+          </p:nvPr>
+        </p:nvSpPr>
+        <p:spPr>
+          <a:xfrm>
+            <a:off x="838200" y="1538544"/>
+            <a:ext cx="10515600" cy="4351338"/>
+          </a:xfrm>
+        </p:spPr>
+        <p:txBody>
+          <a:bodyPr/>
+          <a:lstStyle/>
+          <a:p>
+            <a:r>
+              <a:rPr kumimoji="1" lang="en-US" altLang="zh-TW" dirty="0"/>
+              <a:t>Withdraw within 3 days with penalty: after withdraw</a:t>
+            </a:r>
+          </a:p>
+        </p:txBody>
+      </p:sp>
+      <p:pic>
+        <p:nvPicPr>
+          <p:cNvPr id="5" name="圖片 4">
+            <a:extLst>
+              <a:ext uri="{FF2B5EF4-FFF2-40B4-BE49-F238E27FC236}">
+                <a16:creationId xmlns:a16="http://schemas.microsoft.com/office/drawing/2014/main" id="{E348444E-EADA-4534-F683-82323FD0379B}"/>
+              </a:ext>
+            </a:extLst>
+          </p:cNvPr>
+          <p:cNvPicPr>
+            <a:picLocks noChangeAspect="1"/>
+          </p:cNvPicPr>
+          <p:nvPr/>
+        </p:nvPicPr>
+        <p:blipFill>
+          <a:blip r:embed="rId2"/>
+          <a:stretch>
+            <a:fillRect/>
+          </a:stretch>
+        </p:blipFill>
+        <p:spPr>
+          <a:xfrm>
+            <a:off x="1114646" y="2015215"/>
+            <a:ext cx="8295167" cy="4573353"/>
+          </a:xfrm>
+          <a:prstGeom prst="rect">
+            <a:avLst/>
+          </a:prstGeom>
+        </p:spPr>
+      </p:pic>
+    </p:spTree>
+    <p:extLst>
+      <p:ext uri="{BB962C8B-B14F-4D97-AF65-F5344CB8AC3E}">
+        <p14:creationId xmlns:p14="http://schemas.microsoft.com/office/powerpoint/2010/main" val="2152354370"/>
+      </p:ext>
+    </p:extLst>
+  </p:cSld>
+  <p:clrMapOvr>
+    <a:masterClrMapping/>
+  </p:clrMapOvr>
+</p:sld>
+</file>
+
+<file path=ppt/slides/slide14.xml><?xml version="1.0" encoding="utf-8"?>
+<p:sld xmlns:a="http://schemas.openxmlformats.org/drawingml/2006/main" xmlns:r="http://schemas.openxmlformats.org/officeDocument/2006/relationships" xmlns:p="http://schemas.openxmlformats.org/presentationml/2006/main">
+  <p:cSld>
+    <p:spTree>
+      <p:nvGrpSpPr>
+        <p:cNvPr id="1" name="">
+          <a:extLst>
+            <a:ext uri="{FF2B5EF4-FFF2-40B4-BE49-F238E27FC236}">
+              <a16:creationId xmlns:a16="http://schemas.microsoft.com/office/drawing/2014/main" id="{3BB4AF5F-3932-7DE5-A3C0-098D04B1357C}"/>
+            </a:ext>
+          </a:extLst>
+        </p:cNvPr>
+        <p:cNvGrpSpPr/>
+        <p:nvPr/>
+      </p:nvGrpSpPr>
+      <p:grpSpPr>
+        <a:xfrm>
+          <a:off x="0" y="0"/>
+          <a:ext cx="0" cy="0"/>
+          <a:chOff x="0" y="0"/>
+          <a:chExt cx="0" cy="0"/>
+        </a:xfrm>
+      </p:grpSpPr>
+      <p:sp>
+        <p:nvSpPr>
+          <p:cNvPr id="2" name="標題 1">
+            <a:extLst>
+              <a:ext uri="{FF2B5EF4-FFF2-40B4-BE49-F238E27FC236}">
+                <a16:creationId xmlns:a16="http://schemas.microsoft.com/office/drawing/2014/main" id="{2FA1D9D7-D3C7-0E49-9DE1-FBE13AC81800}"/>
+              </a:ext>
+            </a:extLst>
+          </p:cNvPr>
+          <p:cNvSpPr>
+            <a:spLocks noGrp="1"/>
+          </p:cNvSpPr>
+          <p:nvPr>
+            <p:ph type="title"/>
+          </p:nvPr>
+        </p:nvSpPr>
+        <p:spPr/>
+        <p:txBody>
+          <a:bodyPr>
+            <a:normAutofit/>
+          </a:bodyPr>
+          <a:lstStyle/>
+          <a:p>
+            <a:r>
+              <a:rPr kumimoji="1" lang="en-US" altLang="zh-TW" sz="4000" dirty="0"/>
+              <a:t>Snapshot of all step: Withdraw after 4 days cont.</a:t>
+            </a:r>
+            <a:endParaRPr kumimoji="1" lang="zh-TW" altLang="en-US" sz="4000" dirty="0"/>
+          </a:p>
+        </p:txBody>
+      </p:sp>
+      <p:sp>
+        <p:nvSpPr>
+          <p:cNvPr id="3" name="內容版面配置區 2">
+            <a:extLst>
+              <a:ext uri="{FF2B5EF4-FFF2-40B4-BE49-F238E27FC236}">
+                <a16:creationId xmlns:a16="http://schemas.microsoft.com/office/drawing/2014/main" id="{2A56A1A8-E8C4-33AE-8A86-390F5A9B81A4}"/>
+              </a:ext>
+            </a:extLst>
+          </p:cNvPr>
+          <p:cNvSpPr>
+            <a:spLocks noGrp="1"/>
+          </p:cNvSpPr>
+          <p:nvPr>
+            <p:ph idx="1"/>
+          </p:nvPr>
+        </p:nvSpPr>
+        <p:spPr>
+          <a:xfrm>
+            <a:off x="838200" y="1538544"/>
+            <a:ext cx="10515600" cy="4351338"/>
+          </a:xfrm>
+        </p:spPr>
+        <p:txBody>
+          <a:bodyPr/>
+          <a:lstStyle/>
+          <a:p>
+            <a:r>
+              <a:rPr kumimoji="1" lang="en-US" altLang="zh-TW" dirty="0"/>
+              <a:t>Withdraw after 4 days with </a:t>
+            </a:r>
+            <a:r>
+              <a:rPr kumimoji="1" lang="en-US" altLang="zh-TW" dirty="0">
+                <a:solidFill>
+                  <a:srgbClr val="FF0000"/>
+                </a:solidFill>
+              </a:rPr>
+              <a:t>no</a:t>
+            </a:r>
+            <a:r>
+              <a:rPr kumimoji="1" lang="en-US" altLang="zh-TW" dirty="0"/>
+              <a:t> penalty: before withdraw</a:t>
+            </a:r>
+          </a:p>
+        </p:txBody>
+      </p:sp>
+      <p:pic>
+        <p:nvPicPr>
+          <p:cNvPr id="6" name="圖片 5">
+            <a:extLst>
+              <a:ext uri="{FF2B5EF4-FFF2-40B4-BE49-F238E27FC236}">
+                <a16:creationId xmlns:a16="http://schemas.microsoft.com/office/drawing/2014/main" id="{A147EE03-DD88-FDB0-71DE-D1701CDB082A}"/>
+              </a:ext>
+            </a:extLst>
+          </p:cNvPr>
+          <p:cNvPicPr>
+            <a:picLocks noChangeAspect="1"/>
+          </p:cNvPicPr>
+          <p:nvPr/>
+        </p:nvPicPr>
+        <p:blipFill>
+          <a:blip r:embed="rId2"/>
+          <a:stretch>
+            <a:fillRect/>
+          </a:stretch>
+        </p:blipFill>
+        <p:spPr>
+          <a:xfrm>
+            <a:off x="1095156" y="2030050"/>
+            <a:ext cx="8601738" cy="4719537"/>
+          </a:xfrm>
+          <a:prstGeom prst="rect">
+            <a:avLst/>
+          </a:prstGeom>
+        </p:spPr>
+      </p:pic>
+    </p:spTree>
+    <p:extLst>
+      <p:ext uri="{BB962C8B-B14F-4D97-AF65-F5344CB8AC3E}">
+        <p14:creationId xmlns:p14="http://schemas.microsoft.com/office/powerpoint/2010/main" val="1614891294"/>
+      </p:ext>
+    </p:extLst>
+  </p:cSld>
+  <p:clrMapOvr>
+    <a:masterClrMapping/>
+  </p:clrMapOvr>
+</p:sld>
+</file>
+
+<file path=ppt/slides/slide15.xml><?xml version="1.0" encoding="utf-8"?>
+<p:sld xmlns:a="http://schemas.openxmlformats.org/drawingml/2006/main" xmlns:r="http://schemas.openxmlformats.org/officeDocument/2006/relationships" xmlns:p="http://schemas.openxmlformats.org/presentationml/2006/main">
+  <p:cSld>
+    <p:spTree>
+      <p:nvGrpSpPr>
+        <p:cNvPr id="1" name="">
+          <a:extLst>
+            <a:ext uri="{FF2B5EF4-FFF2-40B4-BE49-F238E27FC236}">
+              <a16:creationId xmlns:a16="http://schemas.microsoft.com/office/drawing/2014/main" id="{21138100-99DF-7A80-2321-B5BCBFAED1EA}"/>
+            </a:ext>
+          </a:extLst>
+        </p:cNvPr>
+        <p:cNvGrpSpPr/>
+        <p:nvPr/>
+      </p:nvGrpSpPr>
+      <p:grpSpPr>
+        <a:xfrm>
+          <a:off x="0" y="0"/>
+          <a:ext cx="0" cy="0"/>
+          <a:chOff x="0" y="0"/>
+          <a:chExt cx="0" cy="0"/>
+        </a:xfrm>
+      </p:grpSpPr>
+      <p:sp>
+        <p:nvSpPr>
+          <p:cNvPr id="2" name="標題 1">
+            <a:extLst>
+              <a:ext uri="{FF2B5EF4-FFF2-40B4-BE49-F238E27FC236}">
+                <a16:creationId xmlns:a16="http://schemas.microsoft.com/office/drawing/2014/main" id="{A3AEC991-4B6A-8162-53EA-592BCC9C5B46}"/>
+              </a:ext>
+            </a:extLst>
+          </p:cNvPr>
+          <p:cNvSpPr>
+            <a:spLocks noGrp="1"/>
+          </p:cNvSpPr>
+          <p:nvPr>
+            <p:ph type="title"/>
+          </p:nvPr>
+        </p:nvSpPr>
+        <p:spPr/>
+        <p:txBody>
+          <a:bodyPr>
+            <a:normAutofit/>
+          </a:bodyPr>
+          <a:lstStyle/>
+          <a:p>
+            <a:r>
+              <a:rPr kumimoji="1" lang="en-US" altLang="zh-TW" sz="4000" dirty="0"/>
+              <a:t>Snapshot of all step: Withdraw after 4 days cont.</a:t>
+            </a:r>
+            <a:endParaRPr kumimoji="1" lang="zh-TW" altLang="en-US" sz="4000" dirty="0"/>
+          </a:p>
+        </p:txBody>
+      </p:sp>
+      <p:sp>
+        <p:nvSpPr>
+          <p:cNvPr id="3" name="內容版面配置區 2">
+            <a:extLst>
+              <a:ext uri="{FF2B5EF4-FFF2-40B4-BE49-F238E27FC236}">
+                <a16:creationId xmlns:a16="http://schemas.microsoft.com/office/drawing/2014/main" id="{169C7E18-0C12-2BDF-3BE4-00EB4395E2B0}"/>
+              </a:ext>
+            </a:extLst>
+          </p:cNvPr>
+          <p:cNvSpPr>
+            <a:spLocks noGrp="1"/>
+          </p:cNvSpPr>
+          <p:nvPr>
+            <p:ph idx="1"/>
+          </p:nvPr>
+        </p:nvSpPr>
+        <p:spPr>
+          <a:xfrm>
+            <a:off x="838200" y="1538544"/>
+            <a:ext cx="10515600" cy="4351338"/>
+          </a:xfrm>
+        </p:spPr>
+        <p:txBody>
+          <a:bodyPr/>
+          <a:lstStyle/>
+          <a:p>
+            <a:r>
+              <a:rPr kumimoji="1" lang="en-US" altLang="zh-TW" dirty="0"/>
+              <a:t>Withdraw after 4 days with </a:t>
+            </a:r>
+            <a:r>
+              <a:rPr kumimoji="1" lang="en-US" altLang="zh-TW" dirty="0">
+                <a:solidFill>
+                  <a:srgbClr val="FF0000"/>
+                </a:solidFill>
+              </a:rPr>
+              <a:t>no</a:t>
+            </a:r>
+            <a:r>
+              <a:rPr kumimoji="1" lang="en-US" altLang="zh-TW" dirty="0"/>
+              <a:t> penalty: after withdraw</a:t>
+            </a:r>
+          </a:p>
+        </p:txBody>
+      </p:sp>
+      <p:pic>
+        <p:nvPicPr>
+          <p:cNvPr id="5" name="圖片 4">
+            <a:extLst>
+              <a:ext uri="{FF2B5EF4-FFF2-40B4-BE49-F238E27FC236}">
+                <a16:creationId xmlns:a16="http://schemas.microsoft.com/office/drawing/2014/main" id="{66E7C077-23A8-EFB5-57BF-83C653AA1D09}"/>
+              </a:ext>
+            </a:extLst>
+          </p:cNvPr>
+          <p:cNvPicPr>
+            <a:picLocks noChangeAspect="1"/>
+          </p:cNvPicPr>
+          <p:nvPr/>
+        </p:nvPicPr>
+        <p:blipFill>
+          <a:blip r:embed="rId2"/>
+          <a:stretch>
+            <a:fillRect/>
+          </a:stretch>
+        </p:blipFill>
+        <p:spPr>
+          <a:xfrm>
+            <a:off x="1180213" y="2054779"/>
+            <a:ext cx="8314661" cy="4535270"/>
+          </a:xfrm>
+          <a:prstGeom prst="rect">
+            <a:avLst/>
+          </a:prstGeom>
+        </p:spPr>
+      </p:pic>
+    </p:spTree>
+    <p:extLst>
+      <p:ext uri="{BB962C8B-B14F-4D97-AF65-F5344CB8AC3E}">
+        <p14:creationId xmlns:p14="http://schemas.microsoft.com/office/powerpoint/2010/main" val="3995339630"/>
+      </p:ext>
+    </p:extLst>
+  </p:cSld>
+  <p:clrMapOvr>
+    <a:masterClrMapping/>
+  </p:clrMapOvr>
+</p:sld>
+</file>
+
+<file path=ppt/slides/slide16.xml><?xml version="1.0" encoding="utf-8"?>
+<p:sld xmlns:a="http://schemas.openxmlformats.org/drawingml/2006/main" xmlns:r="http://schemas.openxmlformats.org/officeDocument/2006/relationships" xmlns:p="http://schemas.openxmlformats.org/presentationml/2006/main">
+  <p:cSld>
+    <p:spTree>
+      <p:nvGrpSpPr>
+        <p:cNvPr id="1" name=""/>
+        <p:cNvGrpSpPr/>
+        <p:nvPr/>
+      </p:nvGrpSpPr>
+      <p:grpSpPr>
+        <a:xfrm>
+          <a:off x="0" y="0"/>
+          <a:ext cx="0" cy="0"/>
+          <a:chOff x="0" y="0"/>
+          <a:chExt cx="0" cy="0"/>
+        </a:xfrm>
+      </p:grpSpPr>
+      <p:sp>
+        <p:nvSpPr>
+          <p:cNvPr id="2" name="標題 1">
+            <a:extLst>
+              <a:ext uri="{FF2B5EF4-FFF2-40B4-BE49-F238E27FC236}">
+                <a16:creationId xmlns:a16="http://schemas.microsoft.com/office/drawing/2014/main" id="{127AC5D8-C167-71EE-A504-B67B8E5958BC}"/>
+              </a:ext>
+            </a:extLst>
+          </p:cNvPr>
+          <p:cNvSpPr>
+            <a:spLocks noGrp="1"/>
+          </p:cNvSpPr>
+          <p:nvPr>
+            <p:ph type="title"/>
+          </p:nvPr>
+        </p:nvSpPr>
+        <p:spPr/>
+        <p:txBody>
+          <a:bodyPr/>
+          <a:lstStyle/>
+          <a:p>
+            <a:r>
+              <a:rPr kumimoji="1" lang="en-US" altLang="zh-TW" dirty="0"/>
+              <a:t>Contract problem: Liquid Trap</a:t>
+            </a:r>
+            <a:endParaRPr kumimoji="1" lang="zh-TW" altLang="en-US" dirty="0"/>
+          </a:p>
+        </p:txBody>
+      </p:sp>
+      <mc:AlternateContent xmlns:mc="http://schemas.openxmlformats.org/markup-compatibility/2006">
+        <mc:Choice xmlns:a14="http://schemas.microsoft.com/office/drawing/2010/main" Requires="a14">
+          <p:sp>
+            <p:nvSpPr>
+              <p:cNvPr id="3" name="內容版面配置區 2">
+                <a:extLst>
+                  <a:ext uri="{FF2B5EF4-FFF2-40B4-BE49-F238E27FC236}">
+                    <a16:creationId xmlns:a16="http://schemas.microsoft.com/office/drawing/2014/main" id="{CE61946C-D644-DD62-5783-7CBE6513418A}"/>
+                  </a:ext>
+                </a:extLst>
+              </p:cNvPr>
+              <p:cNvSpPr>
+                <a:spLocks noGrp="1"/>
+              </p:cNvSpPr>
+              <p:nvPr>
+                <p:ph idx="1"/>
+              </p:nvPr>
+            </p:nvSpPr>
+            <p:spPr/>
+            <p:txBody>
+              <a:bodyPr/>
+              <a:lstStyle/>
+              <a:p>
+                <a:r>
+                  <a:rPr kumimoji="1" lang="zh-TW" altLang="en-US" dirty="0"/>
+                  <a:t>如果沒有人提早領錢出場，分紅池內的獎金將會</a:t>
+                </a:r>
+                <a:r>
+                  <a:rPr kumimoji="1" lang="en-US" altLang="zh-TW" dirty="0"/>
+                  <a:t>0</a:t>
+                </a:r>
+                <a:r>
+                  <a:rPr kumimoji="1" lang="zh-TW" altLang="en-US" dirty="0"/>
+                  <a:t>，也就是</a:t>
+                </a:r>
+                <a:r>
+                  <a:rPr kumimoji="1" lang="en-US" altLang="zh-TW" dirty="0"/>
+                  <a:t>20%</a:t>
+                </a:r>
+                <a:r>
+                  <a:rPr kumimoji="1" lang="zh-TW" altLang="en-US" dirty="0"/>
+                  <a:t>的錢將被鎖在合約裡，無人可領。</a:t>
+                </a:r>
+                <a:endParaRPr kumimoji="1" lang="en-US" altLang="zh-TW" dirty="0"/>
+              </a:p>
+              <a:p>
+                <a:r>
+                  <a:rPr kumimoji="1" lang="zh-TW" altLang="en-US" dirty="0"/>
+                  <a:t>解決方法：</a:t>
+                </a:r>
+                <a:endParaRPr kumimoji="1" lang="en-US" altLang="zh-TW" dirty="0"/>
+              </a:p>
+              <a:p>
+                <a:pPr lvl="1"/>
+                <a:r>
+                  <a:rPr lang="zh-TW" altLang="zh-TW" dirty="0"/>
+                  <a:t>引入淨值動態結算機制</a:t>
+                </a:r>
+                <a:r>
+                  <a:rPr lang="zh-TW" altLang="en-US" dirty="0"/>
+                  <a:t>：（按比例退錢）</a:t>
+                </a:r>
+                <a:endParaRPr lang="en-US" altLang="zh-TW" dirty="0"/>
+              </a:p>
+              <a:p>
+                <a:pPr lvl="2"/>
+                <a14:m>
+                  <m:oMath xmlns:m="http://schemas.openxmlformats.org/officeDocument/2006/math">
+                    <m:r>
+                      <a:rPr kumimoji="1" lang="zh-TW" altLang="en-US" i="1" dirty="0">
+                        <a:latin typeface="Cambria Math" panose="02040503050406030204" pitchFamily="18" charset="0"/>
+                      </a:rPr>
+                      <m:t>你應得的</m:t>
+                    </m:r>
+                    <m:r>
+                      <a:rPr kumimoji="1" lang="zh-TW" altLang="en-US" i="1" dirty="0" smtClean="0">
+                        <a:latin typeface="Cambria Math" panose="02040503050406030204" pitchFamily="18" charset="0"/>
+                      </a:rPr>
+                      <m:t>錢</m:t>
+                    </m:r>
+                    <m:r>
+                      <a:rPr kumimoji="1" lang="en-US" altLang="zh-TW" i="1" dirty="0" smtClean="0">
+                        <a:latin typeface="Cambria Math" panose="02040503050406030204" pitchFamily="18" charset="0"/>
+                        <a:ea typeface="Cambria Math" panose="02040503050406030204" pitchFamily="18" charset="0"/>
+                      </a:rPr>
+                      <m:t>=</m:t>
+                    </m:r>
+                    <m:f>
+                      <m:fPr>
+                        <m:ctrlPr>
+                          <a:rPr kumimoji="1" lang="zh-TW" altLang="en-US" i="1" dirty="0" smtClean="0">
+                            <a:latin typeface="Cambria Math" panose="02040503050406030204" pitchFamily="18" charset="0"/>
+                            <a:ea typeface="Cambria Math" panose="02040503050406030204" pitchFamily="18" charset="0"/>
+                          </a:rPr>
+                        </m:ctrlPr>
+                      </m:fPr>
+                      <m:num>
+                        <m:r>
+                          <a:rPr kumimoji="1" lang="zh-TW" altLang="en-US" i="1" dirty="0">
+                            <a:latin typeface="Cambria Math" panose="02040503050406030204" pitchFamily="18" charset="0"/>
+                            <a:ea typeface="Cambria Math" panose="02040503050406030204" pitchFamily="18" charset="0"/>
+                          </a:rPr>
+                          <m:t>你的份額</m:t>
+                        </m:r>
+                      </m:num>
+                      <m:den>
+                        <m:r>
+                          <a:rPr kumimoji="1" lang="zh-TW" altLang="en-US" i="1" dirty="0">
+                            <a:latin typeface="Cambria Math" panose="02040503050406030204" pitchFamily="18" charset="0"/>
+                            <a:ea typeface="Cambria Math" panose="02040503050406030204" pitchFamily="18" charset="0"/>
+                          </a:rPr>
+                          <m:t>總份額</m:t>
+                        </m:r>
+                      </m:den>
+                    </m:f>
+                    <m:r>
+                      <a:rPr kumimoji="1" lang="zh-TW" altLang="en-US" b="0" i="1" dirty="0" smtClean="0">
+                        <a:latin typeface="Cambria Math" panose="02040503050406030204" pitchFamily="18" charset="0"/>
+                        <a:ea typeface="Cambria Math" panose="02040503050406030204" pitchFamily="18" charset="0"/>
+                      </a:rPr>
+                      <m:t> </m:t>
+                    </m:r>
+                    <m:r>
+                      <a:rPr kumimoji="1" lang="en-US" altLang="zh-TW" b="0" i="1" dirty="0" smtClean="0">
+                        <a:latin typeface="Cambria Math" panose="02040503050406030204" pitchFamily="18" charset="0"/>
+                        <a:ea typeface="Cambria Math" panose="02040503050406030204" pitchFamily="18" charset="0"/>
+                      </a:rPr>
+                      <m:t>×</m:t>
+                    </m:r>
+                    <m:r>
+                      <a:rPr kumimoji="1" lang="zh-TW" altLang="en-US" b="0" i="1" dirty="0" smtClean="0">
+                        <a:latin typeface="Cambria Math" panose="02040503050406030204" pitchFamily="18" charset="0"/>
+                        <a:ea typeface="Cambria Math" panose="02040503050406030204" pitchFamily="18" charset="0"/>
+                      </a:rPr>
+                      <m:t> </m:t>
+                    </m:r>
+                    <m:r>
+                      <a:rPr kumimoji="1" lang="zh-TW" altLang="en-US" i="1" dirty="0">
+                        <a:latin typeface="Cambria Math" panose="02040503050406030204" pitchFamily="18" charset="0"/>
+                        <a:ea typeface="Cambria Math" panose="02040503050406030204" pitchFamily="18" charset="0"/>
+                      </a:rPr>
+                      <m:t>合約目前總資產</m:t>
+                    </m:r>
+                  </m:oMath>
+                </a14:m>
+                <a:endParaRPr kumimoji="1" lang="en-US" altLang="zh-TW" dirty="0"/>
+              </a:p>
+              <a:p>
+                <a:pPr lvl="1"/>
+                <a:r>
+                  <a:rPr lang="zh-TW" altLang="zh-TW" dirty="0"/>
+                  <a:t>合約終局清算</a:t>
+                </a:r>
+                <a:r>
+                  <a:rPr lang="zh-TW" altLang="en-US" dirty="0"/>
+                  <a:t>：</a:t>
+                </a:r>
+                <a:endParaRPr lang="en-US" altLang="zh-TW" dirty="0"/>
+              </a:p>
+              <a:p>
+                <a:pPr lvl="2"/>
+                <a:r>
+                  <a:rPr kumimoji="1" lang="zh-TW" altLang="en-US" dirty="0"/>
+                  <a:t>當基金要關閉時，由 </a:t>
+                </a:r>
+                <a:r>
+                  <a:rPr kumimoji="1" lang="en" altLang="zh-TW" dirty="0"/>
+                  <a:t>admin </a:t>
+                </a:r>
+                <a:r>
+                  <a:rPr kumimoji="1" lang="zh-TW" altLang="en-US" dirty="0"/>
+                  <a:t>呼叫，把合約裡殘留的、因為熊市少發份額而多出來的 </a:t>
+                </a:r>
+                <a:r>
+                  <a:rPr kumimoji="1" lang="en" altLang="zh-TW" dirty="0"/>
+                  <a:t>ETH</a:t>
+                </a:r>
+                <a:r>
+                  <a:rPr kumimoji="1" lang="zh-TW" altLang="en" dirty="0"/>
+                  <a:t>（</a:t>
+                </a:r>
+                <a:r>
+                  <a:rPr kumimoji="1" lang="zh-TW" altLang="en-US" dirty="0"/>
+                  <a:t>現金儲備），全額提領出來，再手動發還給用戶，或當作基金經理人的操盤手續費（</a:t>
+                </a:r>
+                <a:r>
+                  <a:rPr kumimoji="1" lang="en" altLang="zh-TW" dirty="0"/>
+                  <a:t>Performance Fee</a:t>
+                </a:r>
+                <a:r>
+                  <a:rPr kumimoji="1" lang="zh-TW" altLang="en" dirty="0"/>
+                  <a:t>）。</a:t>
+                </a:r>
+                <a:endParaRPr kumimoji="1" lang="zh-TW" altLang="en-US" dirty="0"/>
+              </a:p>
+            </p:txBody>
+          </p:sp>
+        </mc:Choice>
+        <mc:Fallback>
+          <p:sp>
+            <p:nvSpPr>
+              <p:cNvPr id="3" name="內容版面配置區 2">
+                <a:extLst>
+                  <a:ext uri="{FF2B5EF4-FFF2-40B4-BE49-F238E27FC236}">
+                    <a16:creationId xmlns:a16="http://schemas.microsoft.com/office/drawing/2014/main" id="{CE61946C-D644-DD62-5783-7CBE6513418A}"/>
+                  </a:ext>
+                </a:extLst>
+              </p:cNvPr>
+              <p:cNvSpPr>
+                <a:spLocks noGrp="1" noRot="1" noChangeAspect="1" noMove="1" noResize="1" noEditPoints="1" noAdjustHandles="1" noChangeArrowheads="1" noChangeShapeType="1" noTextEdit="1"/>
+              </p:cNvSpPr>
+              <p:nvPr>
+                <p:ph idx="1"/>
+              </p:nvPr>
+            </p:nvSpPr>
+            <p:spPr>
+              <a:blipFill>
+                <a:blip r:embed="rId2"/>
+                <a:stretch>
+                  <a:fillRect l="-1086" t="-2616" r="-483"/>
+                </a:stretch>
+              </a:blipFill>
+            </p:spPr>
+            <p:txBody>
+              <a:bodyPr/>
+              <a:lstStyle/>
+              <a:p>
+                <a:r>
+                  <a:rPr lang="zh-TW" altLang="en-US">
+                    <a:noFill/>
+                  </a:rPr>
+                  <a:t> </a:t>
+                </a:r>
+              </a:p>
+            </p:txBody>
+          </p:sp>
+        </mc:Fallback>
+      </mc:AlternateContent>
+    </p:spTree>
+    <p:extLst>
+      <p:ext uri="{BB962C8B-B14F-4D97-AF65-F5344CB8AC3E}">
+        <p14:creationId xmlns:p14="http://schemas.microsoft.com/office/powerpoint/2010/main" val="463469275"/>
+      </p:ext>
+    </p:extLst>
+  </p:cSld>
+  <p:clrMapOvr>
+    <a:masterClrMapping/>
+  </p:clrMapOvr>
+</p:sld>
+</file>
+
+<file path=ppt/slides/slide17.xml><?xml version="1.0" encoding="utf-8"?>
+<p:sld xmlns:a="http://schemas.openxmlformats.org/drawingml/2006/main" xmlns:r="http://schemas.openxmlformats.org/officeDocument/2006/relationships" xmlns:p="http://schemas.openxmlformats.org/presentationml/2006/main">
+  <p:cSld>
+    <p:spTree>
+      <p:nvGrpSpPr>
+        <p:cNvPr id="1" name=""/>
+        <p:cNvGrpSpPr/>
+        <p:nvPr/>
+      </p:nvGrpSpPr>
+      <p:grpSpPr>
+        <a:xfrm>
+          <a:off x="0" y="0"/>
+          <a:ext cx="0" cy="0"/>
+          <a:chOff x="0" y="0"/>
+          <a:chExt cx="0" cy="0"/>
+        </a:xfrm>
+      </p:grpSpPr>
+      <p:sp>
+        <p:nvSpPr>
+          <p:cNvPr id="2" name="標題 1">
+            <a:extLst>
+              <a:ext uri="{FF2B5EF4-FFF2-40B4-BE49-F238E27FC236}">
+                <a16:creationId xmlns:a16="http://schemas.microsoft.com/office/drawing/2014/main" id="{879EEBE5-49D8-C781-0727-C332F2113E44}"/>
+              </a:ext>
+            </a:extLst>
+          </p:cNvPr>
+          <p:cNvSpPr>
+            <a:spLocks noGrp="1"/>
+          </p:cNvSpPr>
+          <p:nvPr>
+            <p:ph type="title"/>
+          </p:nvPr>
+        </p:nvSpPr>
+        <p:spPr/>
+        <p:txBody>
+          <a:bodyPr/>
+          <a:lstStyle/>
+          <a:p>
+            <a:r>
+              <a:rPr kumimoji="1" lang="en-US" altLang="zh-TW" dirty="0" err="1"/>
+              <a:t>Github</a:t>
+            </a:r>
+            <a:r>
+              <a:rPr kumimoji="1" lang="en-US" altLang="zh-TW" dirty="0"/>
+              <a:t> Link</a:t>
+            </a:r>
+            <a:endParaRPr kumimoji="1" lang="zh-TW" altLang="en-US" dirty="0"/>
+          </a:p>
+        </p:txBody>
+      </p:sp>
+      <p:sp>
+        <p:nvSpPr>
+          <p:cNvPr id="3" name="內容版面配置區 2">
+            <a:extLst>
+              <a:ext uri="{FF2B5EF4-FFF2-40B4-BE49-F238E27FC236}">
+                <a16:creationId xmlns:a16="http://schemas.microsoft.com/office/drawing/2014/main" id="{CD728471-C561-0564-624F-E5508827796A}"/>
+              </a:ext>
+            </a:extLst>
+          </p:cNvPr>
+          <p:cNvSpPr>
+            <a:spLocks noGrp="1"/>
+          </p:cNvSpPr>
+          <p:nvPr>
+            <p:ph idx="1"/>
+          </p:nvPr>
+        </p:nvSpPr>
+        <p:spPr/>
+        <p:txBody>
+          <a:bodyPr/>
+          <a:lstStyle/>
+          <a:p>
+            <a:r>
+              <a:rPr kumimoji="1" lang="en" altLang="zh-TW" dirty="0">
+                <a:hlinkClick r:id="rId2"/>
+              </a:rPr>
+              <a:t>https://github.com/imlone1y/Automated-Dynamic-Momentum-Vault</a:t>
+            </a:r>
+            <a:r>
+              <a:rPr kumimoji="1" lang="en" altLang="zh-TW" dirty="0"/>
+              <a:t> </a:t>
+            </a:r>
+            <a:endParaRPr kumimoji="1" lang="zh-TW" altLang="en-US" dirty="0"/>
+          </a:p>
+        </p:txBody>
+      </p:sp>
+    </p:spTree>
+    <p:extLst>
+      <p:ext uri="{BB962C8B-B14F-4D97-AF65-F5344CB8AC3E}">
+        <p14:creationId xmlns:p14="http://schemas.microsoft.com/office/powerpoint/2010/main" val="944549343"/>
+      </p:ext>
+    </p:extLst>
+  </p:cSld>
+  <p:clrMapOvr>
+    <a:masterClrMapping/>
+  </p:clrMapOvr>
+</p:sld>
+</file>
+
 <file path=ppt/slides/slide2.xml><?xml version="1.0" encoding="utf-8"?>
 <p:sld xmlns:a="http://schemas.openxmlformats.org/drawingml/2006/main" xmlns:r="http://schemas.openxmlformats.org/officeDocument/2006/relationships" xmlns:p="http://schemas.openxmlformats.org/presentationml/2006/main">
   <p:cSld>
@@ -3467,7 +4674,12 @@
             <p:ph idx="1"/>
           </p:nvPr>
         </p:nvSpPr>
-        <p:spPr/>
+        <p:spPr>
+          <a:xfrm>
+            <a:off x="838200" y="1825625"/>
+            <a:ext cx="10515600" cy="4667250"/>
+          </a:xfrm>
+        </p:spPr>
         <p:txBody>
           <a:bodyPr/>
           <a:lstStyle/>
@@ -3482,15 +4694,15 @@
             <a:pPr lvl="1"/>
             <a:r>
               <a:rPr kumimoji="1" lang="zh-TW" altLang="en-US" dirty="0"/>
-              <a:t>當市場行情好時</a:t>
+              <a:t>當市場處於行情好</a:t>
             </a:r>
             <a:r>
               <a:rPr kumimoji="1" lang="en-US" altLang="zh-TW" dirty="0"/>
-              <a:t> (market &gt; 800 BULL)</a:t>
+              <a:t> ( market &gt;= 800 BULL )</a:t>
             </a:r>
             <a:r>
               <a:rPr kumimoji="1" lang="zh-TW" altLang="en-US" dirty="0"/>
-              <a:t>，資金將</a:t>
+              <a:t> 時，資金將</a:t>
             </a:r>
             <a:r>
               <a:rPr kumimoji="1" lang="en-US" altLang="zh-TW" dirty="0"/>
@@ -3506,7 +4718,7 @@
             <a:pPr lvl="1"/>
             <a:r>
               <a:rPr kumimoji="1" lang="zh-TW" altLang="en-US" dirty="0"/>
-              <a:t>當市場保守時</a:t>
+              <a:t>當市場處於保守</a:t>
             </a:r>
             <a:r>
               <a:rPr kumimoji="1" lang="en-US" altLang="zh-TW" dirty="0"/>
@@ -3522,7 +4734,7 @@
             </a:r>
             <a:r>
               <a:rPr kumimoji="1" lang="zh-TW" altLang="en-US" dirty="0"/>
-              <a:t>，資金將</a:t>
+              <a:t> 時，資金將</a:t>
             </a:r>
             <a:r>
               <a:rPr kumimoji="1" lang="en-US" altLang="zh-TW" dirty="0"/>
@@ -3530,13 +4742,37 @@
             </a:r>
             <a:r>
               <a:rPr kumimoji="1" lang="zh-TW" altLang="en-US" dirty="0"/>
-              <a:t>存入虛擬貨幣</a:t>
-            </a:r>
-            <a:r>
-              <a:rPr kumimoji="1" lang="zh-TW" altLang="en-US"/>
-              <a:t>中，避免</a:t>
+              <a:t>存入虛擬貨幣中，降低用戶資產在熊市的風險暴露。</a:t>
             </a:r>
             <a:endParaRPr kumimoji="1" lang="en-US" altLang="zh-TW" dirty="0"/>
+          </a:p>
+          <a:p>
+            <a:pPr lvl="1"/>
+            <a:r>
+              <a:rPr kumimoji="1" lang="zh-TW" altLang="en-US" dirty="0"/>
+              <a:t>當市場處於</a:t>
+            </a:r>
+            <a:r>
+              <a:rPr lang="zh-TW" altLang="zh-TW" dirty="0"/>
+              <a:t>閃崩斷路器</a:t>
+            </a:r>
+            <a:r>
+              <a:rPr lang="en-US" altLang="zh-TW" dirty="0"/>
+              <a:t> ( market &lt;= 500 FLASH_CRASH )</a:t>
+            </a:r>
+            <a:r>
+              <a:rPr lang="zh-TW" altLang="en-US" dirty="0"/>
+              <a:t>，存入 </a:t>
+            </a:r>
+            <a:r>
+              <a:rPr lang="en-US" altLang="zh-TW" dirty="0"/>
+              <a:t>/</a:t>
+            </a:r>
+            <a:r>
+              <a:rPr lang="zh-TW" altLang="en-US" dirty="0"/>
+              <a:t> 提款功能將會被鎖定無法使用。另外開啟緊急保本退款，退款數目將全數退回，而不扣手續費及不參與分紅池活動。</a:t>
+            </a:r>
+            <a:endParaRPr lang="en-US" altLang="zh-TW" dirty="0"/>
           </a:p>
         </p:txBody>
       </p:sp>
@@ -3544,6 +4780,1473 @@
     <p:extLst>
       <p:ext uri="{BB962C8B-B14F-4D97-AF65-F5344CB8AC3E}">
         <p14:creationId xmlns:p14="http://schemas.microsoft.com/office/powerpoint/2010/main" val="3167499034"/>
+      </p:ext>
+    </p:extLst>
+  </p:cSld>
+  <p:clrMapOvr>
+    <a:masterClrMapping/>
+  </p:clrMapOvr>
+</p:sld>
+</file>
+
+<file path=ppt/slides/slide3.xml><?xml version="1.0" encoding="utf-8"?>
+<p:sld xmlns:a="http://schemas.openxmlformats.org/drawingml/2006/main" xmlns:r="http://schemas.openxmlformats.org/officeDocument/2006/relationships" xmlns:p="http://schemas.openxmlformats.org/presentationml/2006/main">
+  <p:cSld>
+    <p:spTree>
+      <p:nvGrpSpPr>
+        <p:cNvPr id="1" name=""/>
+        <p:cNvGrpSpPr/>
+        <p:nvPr/>
+      </p:nvGrpSpPr>
+      <p:grpSpPr>
+        <a:xfrm>
+          <a:off x="0" y="0"/>
+          <a:ext cx="0" cy="0"/>
+          <a:chOff x="0" y="0"/>
+          <a:chExt cx="0" cy="0"/>
+        </a:xfrm>
+      </p:grpSpPr>
+      <p:sp>
+        <p:nvSpPr>
+          <p:cNvPr id="2" name="標題 1">
+            <a:extLst>
+              <a:ext uri="{FF2B5EF4-FFF2-40B4-BE49-F238E27FC236}">
+                <a16:creationId xmlns:a16="http://schemas.microsoft.com/office/drawing/2014/main" id="{044BADF2-1260-8E82-2F1B-9DBDF7AECD41}"/>
+              </a:ext>
+            </a:extLst>
+          </p:cNvPr>
+          <p:cNvSpPr>
+            <a:spLocks noGrp="1"/>
+          </p:cNvSpPr>
+          <p:nvPr>
+            <p:ph type="title"/>
+          </p:nvPr>
+        </p:nvSpPr>
+        <p:spPr/>
+        <p:txBody>
+          <a:bodyPr/>
+          <a:lstStyle/>
+          <a:p>
+            <a:r>
+              <a:rPr kumimoji="1" lang="en-US" altLang="zh-TW" dirty="0"/>
+              <a:t>Goal of smart contract cont.</a:t>
+            </a:r>
+            <a:endParaRPr kumimoji="1" lang="zh-TW" altLang="en-US" dirty="0"/>
+          </a:p>
+        </p:txBody>
+      </p:sp>
+      <mc:AlternateContent xmlns:mc="http://schemas.openxmlformats.org/markup-compatibility/2006" xmlns:a14="http://schemas.microsoft.com/office/drawing/2010/main">
+        <mc:Choice Requires="a14">
+          <p:sp>
+            <p:nvSpPr>
+              <p:cNvPr id="3" name="內容版面配置區 2">
+                <a:extLst>
+                  <a:ext uri="{FF2B5EF4-FFF2-40B4-BE49-F238E27FC236}">
+                    <a16:creationId xmlns:a16="http://schemas.microsoft.com/office/drawing/2014/main" id="{F6BC7837-090B-D04B-6B40-AB1E2A5F6247}"/>
+                  </a:ext>
+                </a:extLst>
+              </p:cNvPr>
+              <p:cNvSpPr>
+                <a:spLocks noGrp="1"/>
+              </p:cNvSpPr>
+              <p:nvPr>
+                <p:ph idx="1"/>
+              </p:nvPr>
+            </p:nvSpPr>
+            <p:spPr/>
+            <p:txBody>
+              <a:bodyPr/>
+              <a:lstStyle/>
+              <a:p>
+                <a:r>
+                  <a:rPr kumimoji="1" lang="zh-TW" altLang="en-US" dirty="0"/>
+                  <a:t>時間鎖、分紅池機制：</a:t>
+                </a:r>
+                <a:endParaRPr kumimoji="1" lang="en-US" altLang="zh-TW" dirty="0"/>
+              </a:p>
+              <a:p>
+                <a:pPr lvl="1"/>
+                <a:r>
+                  <a:rPr kumimoji="1" lang="zh-TW" altLang="en-US" dirty="0"/>
+                  <a:t>當需提款存入不到 </a:t>
+                </a:r>
+                <a:r>
+                  <a:rPr kumimoji="1" lang="en-US" altLang="zh-TW" dirty="0"/>
+                  <a:t>3</a:t>
+                </a:r>
+                <a:r>
+                  <a:rPr kumimoji="1" lang="zh-TW" altLang="en-US" dirty="0"/>
+                  <a:t> 天的款項時，須被強製扣除 </a:t>
+                </a:r>
+                <a:r>
+                  <a:rPr kumimoji="1" lang="en-US" altLang="zh-TW" dirty="0"/>
+                  <a:t>5%</a:t>
+                </a:r>
+                <a:r>
+                  <a:rPr kumimoji="1" lang="zh-TW" altLang="en-US" dirty="0"/>
+                  <a:t> 的罰款並存入分紅池中。</a:t>
+                </a:r>
+                <a:endParaRPr kumimoji="1" lang="en-US" altLang="zh-TW" dirty="0"/>
+              </a:p>
+              <a:p>
+                <a:pPr lvl="1"/>
+                <a:r>
+                  <a:rPr kumimoji="1" lang="zh-TW" altLang="en-US" dirty="0"/>
+                  <a:t>當提款已存入超過</a:t>
+                </a:r>
+                <a:r>
+                  <a:rPr kumimoji="1" lang="en-US" altLang="zh-TW" dirty="0"/>
+                  <a:t> 3 </a:t>
+                </a:r>
+                <a:r>
+                  <a:rPr kumimoji="1" lang="zh-TW" altLang="en-US" dirty="0"/>
+                  <a:t>天的款項，可按比例瓜分分紅池內獎金。</a:t>
+                </a:r>
+                <a:endParaRPr kumimoji="1" lang="en-US" altLang="zh-TW" dirty="0"/>
+              </a:p>
+              <a:p>
+                <a:pPr lvl="1"/>
+                <a:r>
+                  <a:rPr kumimoji="1" lang="zh-TW" altLang="en-US" dirty="0"/>
+                  <a:t>合約計算分紅公式：</a:t>
+                </a:r>
+                <a:endParaRPr kumimoji="1" lang="en-US" altLang="zh-TW" dirty="0"/>
+              </a:p>
+              <a:p>
+                <a:pPr marL="457200" lvl="1" indent="0">
+                  <a:buNone/>
+                </a:pPr>
+                <a:r>
+                  <a:rPr kumimoji="1" lang="en-US" altLang="zh-TW" dirty="0"/>
+                  <a:t>		</a:t>
+                </a:r>
+                <a14:m>
+                  <m:oMath xmlns:m="http://schemas.openxmlformats.org/officeDocument/2006/math">
+                    <m:r>
+                      <a:rPr kumimoji="1" lang="en-US" altLang="zh-TW" i="1" dirty="0" smtClean="0">
+                        <a:latin typeface="Cambria Math" panose="02040503050406030204" pitchFamily="18" charset="0"/>
+                      </a:rPr>
+                      <m:t>𝑏𝑜𝑛𝑢𝑠</m:t>
+                    </m:r>
+                    <m:r>
+                      <a:rPr kumimoji="1" lang="en-US" altLang="zh-TW" b="0" i="1" dirty="0" smtClean="0">
+                        <a:latin typeface="Cambria Math" panose="02040503050406030204" pitchFamily="18" charset="0"/>
+                      </a:rPr>
+                      <m:t> </m:t>
+                    </m:r>
+                  </m:oMath>
+                </a14:m>
+                <a:r>
+                  <a:rPr kumimoji="1" lang="en-US" altLang="zh-TW" dirty="0"/>
+                  <a:t>= </a:t>
+                </a:r>
+                <a14:m>
+                  <m:oMath xmlns:m="http://schemas.openxmlformats.org/officeDocument/2006/math">
+                    <m:f>
+                      <m:fPr>
+                        <m:ctrlPr>
+                          <a:rPr kumimoji="1" lang="en-US" altLang="zh-TW" i="1" smtClean="0">
+                            <a:latin typeface="Cambria Math" panose="02040503050406030204" pitchFamily="18" charset="0"/>
+                          </a:rPr>
+                        </m:ctrlPr>
+                      </m:fPr>
+                      <m:num>
+                        <m:r>
+                          <a:rPr kumimoji="1" lang="zh-TW" altLang="en-US" i="0" smtClean="0">
+                            <a:latin typeface="Cambria Math" panose="02040503050406030204" pitchFamily="18" charset="0"/>
+                          </a:rPr>
+                          <m:t> </m:t>
+                        </m:r>
+                        <m:r>
+                          <m:rPr>
+                            <m:nor/>
+                          </m:rPr>
+                          <a:rPr kumimoji="1" lang="en-US" altLang="zh-TW" b="0" i="0" smtClean="0">
+                            <a:latin typeface="Cambria Math" panose="02040503050406030204" pitchFamily="18" charset="0"/>
+                          </a:rPr>
+                          <m:t>accu</m:t>
+                        </m:r>
+                        <m:r>
+                          <m:rPr>
+                            <m:sty m:val="p"/>
+                          </m:rPr>
+                          <a:rPr kumimoji="1" lang="en-US" altLang="zh-TW" b="0" i="1" smtClean="0">
+                            <a:latin typeface="Cambria Math" panose="02040503050406030204" pitchFamily="18" charset="0"/>
+                          </a:rPr>
+                          <m:t>mlatedPenaltyPool</m:t>
+                        </m:r>
+                        <m:r>
+                          <a:rPr kumimoji="1" lang="en-US" altLang="zh-TW" b="0" i="1" smtClean="0">
+                            <a:latin typeface="Cambria Math" panose="02040503050406030204" pitchFamily="18" charset="0"/>
+                          </a:rPr>
+                          <m:t> × </m:t>
+                        </m:r>
+                        <m:r>
+                          <m:rPr>
+                            <m:sty m:val="p"/>
+                          </m:rPr>
+                          <a:rPr kumimoji="1" lang="en-US" altLang="zh-TW" b="0" i="1" smtClean="0">
+                            <a:latin typeface="Cambria Math" panose="02040503050406030204" pitchFamily="18" charset="0"/>
+                            <a:ea typeface="Cambria Math" panose="02040503050406030204" pitchFamily="18" charset="0"/>
+                          </a:rPr>
+                          <m:t>user</m:t>
+                        </m:r>
+                        <m:r>
+                          <a:rPr kumimoji="1" lang="en-US" altLang="zh-TW" b="0" i="1" smtClean="0">
+                            <a:latin typeface="Cambria Math" panose="02040503050406030204" pitchFamily="18" charset="0"/>
+                            <a:ea typeface="Cambria Math" panose="02040503050406030204" pitchFamily="18" charset="0"/>
+                          </a:rPr>
+                          <m:t>.</m:t>
+                        </m:r>
+                        <m:r>
+                          <m:rPr>
+                            <m:sty m:val="p"/>
+                          </m:rPr>
+                          <a:rPr kumimoji="1" lang="en-US" altLang="zh-TW" b="0" i="1" smtClean="0">
+                            <a:latin typeface="Cambria Math" panose="02040503050406030204" pitchFamily="18" charset="0"/>
+                            <a:ea typeface="Cambria Math" panose="02040503050406030204" pitchFamily="18" charset="0"/>
+                          </a:rPr>
+                          <m:t>shares</m:t>
+                        </m:r>
+                      </m:num>
+                      <m:den>
+                        <m:r>
+                          <m:rPr>
+                            <m:sty m:val="p"/>
+                          </m:rPr>
+                          <a:rPr kumimoji="1" lang="en-US" altLang="zh-TW" b="0" i="1" smtClean="0">
+                            <a:latin typeface="Cambria Math" panose="02040503050406030204" pitchFamily="18" charset="0"/>
+                          </a:rPr>
+                          <m:t>totalVaultShares</m:t>
+                        </m:r>
+                      </m:den>
+                    </m:f>
+                  </m:oMath>
+                </a14:m>
+                <a:endParaRPr kumimoji="1" lang="en-US" altLang="zh-TW" dirty="0"/>
+              </a:p>
+            </p:txBody>
+          </p:sp>
+        </mc:Choice>
+        <mc:Fallback xmlns="">
+          <p:sp>
+            <p:nvSpPr>
+              <p:cNvPr id="3" name="內容版面配置區 2">
+                <a:extLst>
+                  <a:ext uri="{FF2B5EF4-FFF2-40B4-BE49-F238E27FC236}">
+                    <a16:creationId xmlns:a16="http://schemas.microsoft.com/office/drawing/2014/main" id="{F6BC7837-090B-D04B-6B40-AB1E2A5F6247}"/>
+                  </a:ext>
+                </a:extLst>
+              </p:cNvPr>
+              <p:cNvSpPr>
+                <a:spLocks noGrp="1" noRot="1" noChangeAspect="1" noMove="1" noResize="1" noEditPoints="1" noAdjustHandles="1" noChangeArrowheads="1" noChangeShapeType="1" noTextEdit="1"/>
+              </p:cNvSpPr>
+              <p:nvPr>
+                <p:ph idx="1"/>
+              </p:nvPr>
+            </p:nvSpPr>
+            <p:spPr>
+              <a:blipFill>
+                <a:blip r:embed="rId2"/>
+                <a:stretch>
+                  <a:fillRect l="-1086" t="-2616"/>
+                </a:stretch>
+              </a:blipFill>
+            </p:spPr>
+            <p:txBody>
+              <a:bodyPr/>
+              <a:lstStyle/>
+              <a:p>
+                <a:r>
+                  <a:rPr lang="zh-TW" altLang="en-US">
+                    <a:noFill/>
+                  </a:rPr>
+                  <a:t> </a:t>
+                </a:r>
+              </a:p>
+            </p:txBody>
+          </p:sp>
+        </mc:Fallback>
+      </mc:AlternateContent>
+    </p:spTree>
+    <p:extLst>
+      <p:ext uri="{BB962C8B-B14F-4D97-AF65-F5344CB8AC3E}">
+        <p14:creationId xmlns:p14="http://schemas.microsoft.com/office/powerpoint/2010/main" val="230334525"/>
+      </p:ext>
+    </p:extLst>
+  </p:cSld>
+  <p:clrMapOvr>
+    <a:masterClrMapping/>
+  </p:clrMapOvr>
+</p:sld>
+</file>
+
+<file path=ppt/slides/slide4.xml><?xml version="1.0" encoding="utf-8"?>
+<p:sld xmlns:a="http://schemas.openxmlformats.org/drawingml/2006/main" xmlns:r="http://schemas.openxmlformats.org/officeDocument/2006/relationships" xmlns:p="http://schemas.openxmlformats.org/presentationml/2006/main">
+  <p:cSld>
+    <p:spTree>
+      <p:nvGrpSpPr>
+        <p:cNvPr id="1" name=""/>
+        <p:cNvGrpSpPr/>
+        <p:nvPr/>
+      </p:nvGrpSpPr>
+      <p:grpSpPr>
+        <a:xfrm>
+          <a:off x="0" y="0"/>
+          <a:ext cx="0" cy="0"/>
+          <a:chOff x="0" y="0"/>
+          <a:chExt cx="0" cy="0"/>
+        </a:xfrm>
+      </p:grpSpPr>
+      <p:sp>
+        <p:nvSpPr>
+          <p:cNvPr id="2" name="標題 1">
+            <a:extLst>
+              <a:ext uri="{FF2B5EF4-FFF2-40B4-BE49-F238E27FC236}">
+                <a16:creationId xmlns:a16="http://schemas.microsoft.com/office/drawing/2014/main" id="{621F9979-881F-7941-66EB-CD9A80DCE2EA}"/>
+              </a:ext>
+            </a:extLst>
+          </p:cNvPr>
+          <p:cNvSpPr>
+            <a:spLocks noGrp="1"/>
+          </p:cNvSpPr>
+          <p:nvPr>
+            <p:ph type="title"/>
+          </p:nvPr>
+        </p:nvSpPr>
+        <p:spPr/>
+        <p:txBody>
+          <a:bodyPr/>
+          <a:lstStyle/>
+          <a:p>
+            <a:r>
+              <a:rPr kumimoji="1" lang="en-US" altLang="zh-TW" dirty="0"/>
+              <a:t>The function of smart contract</a:t>
+            </a:r>
+            <a:endParaRPr kumimoji="1" lang="zh-TW" altLang="en-US" dirty="0"/>
+          </a:p>
+        </p:txBody>
+      </p:sp>
+      <p:sp>
+        <p:nvSpPr>
+          <p:cNvPr id="3" name="內容版面配置區 2">
+            <a:extLst>
+              <a:ext uri="{FF2B5EF4-FFF2-40B4-BE49-F238E27FC236}">
+                <a16:creationId xmlns:a16="http://schemas.microsoft.com/office/drawing/2014/main" id="{A8101FE0-CB73-D5A1-7DC7-81B4F13F3A1B}"/>
+              </a:ext>
+            </a:extLst>
+          </p:cNvPr>
+          <p:cNvSpPr>
+            <a:spLocks noGrp="1"/>
+          </p:cNvSpPr>
+          <p:nvPr>
+            <p:ph idx="1"/>
+          </p:nvPr>
+        </p:nvSpPr>
+        <p:spPr>
+          <a:xfrm>
+            <a:off x="838200" y="1690688"/>
+            <a:ext cx="10515600" cy="4802187"/>
+          </a:xfrm>
+        </p:spPr>
+        <p:txBody>
+          <a:bodyPr>
+            <a:normAutofit/>
+          </a:bodyPr>
+          <a:lstStyle/>
+          <a:p>
+            <a:r>
+              <a:rPr kumimoji="1" lang="en-US" altLang="zh-TW" sz="2400" dirty="0"/>
+              <a:t>`owner`</a:t>
+            </a:r>
+            <a:r>
+              <a:rPr lang="zh-TW" altLang="zh-TW" sz="2400" dirty="0"/>
+              <a:t>合約管理員</a:t>
+            </a:r>
+            <a:r>
+              <a:rPr lang="zh-TW" altLang="en-US" sz="2400" dirty="0"/>
+              <a:t>：擁有更改時間及市場價格的權限。</a:t>
+            </a:r>
+            <a:endParaRPr lang="en-US" altLang="zh-TW" sz="2400" dirty="0"/>
+          </a:p>
+          <a:p>
+            <a:r>
+              <a:rPr lang="en-US" altLang="zh-TW" sz="2400" dirty="0"/>
+              <a:t>`</a:t>
+            </a:r>
+            <a:r>
+              <a:rPr lang="zh-TW" altLang="zh-TW" sz="2400" dirty="0"/>
+              <a:t>currentMarketState</a:t>
+            </a:r>
+            <a:r>
+              <a:rPr lang="en-US" altLang="zh-TW" sz="2400" dirty="0"/>
+              <a:t>`state machine: </a:t>
+            </a:r>
+            <a:r>
+              <a:rPr lang="zh-TW" altLang="en-US" sz="2400" dirty="0"/>
+              <a:t>包含</a:t>
+            </a:r>
+            <a:r>
+              <a:rPr lang="zh-TW" altLang="zh-TW" sz="2400" dirty="0"/>
+              <a:t>BULL（牛市）、BEAR（熊市）、FLASH_CRASH（閃崩）。合約所有的業務邏輯（存、取款）都會根據這個狀態自動切換行為。</a:t>
+            </a:r>
+            <a:endParaRPr lang="en-US" altLang="zh-TW" sz="2400" dirty="0"/>
+          </a:p>
+          <a:p>
+            <a:r>
+              <a:rPr lang="en-US" altLang="zh-TW" sz="2400" dirty="0"/>
+              <a:t>`CRASH_THRESHOLD` = 500</a:t>
+            </a:r>
+            <a:r>
+              <a:rPr lang="zh-TW" altLang="en-US" sz="2400" dirty="0"/>
+              <a:t>：閃崩臨界值。只要預言機回報的價格低於或等於此數值，將直接觸發斷路器。</a:t>
+            </a:r>
+          </a:p>
+          <a:p>
+            <a:r>
+              <a:rPr lang="en-US" altLang="zh-TW" sz="2400" dirty="0"/>
+              <a:t>`EARLY_WITHDRAW_PENALTY_TIME` = 3 days</a:t>
+            </a:r>
+            <a:r>
+              <a:rPr lang="zh-TW" altLang="en-US" sz="2400" dirty="0"/>
+              <a:t>：時間鎖門檻。存入資產未滿 </a:t>
+            </a:r>
+            <a:r>
+              <a:rPr lang="en-US" altLang="zh-TW" sz="2400" dirty="0"/>
+              <a:t>3 </a:t>
+            </a:r>
+            <a:r>
+              <a:rPr lang="zh-TW" altLang="en-US" sz="2400" dirty="0"/>
+              <a:t>天者將面臨早退懲罰。</a:t>
+            </a:r>
+          </a:p>
+          <a:p>
+            <a:r>
+              <a:rPr lang="en-US" altLang="zh-TW" sz="2400" dirty="0"/>
+              <a:t>`</a:t>
+            </a:r>
+            <a:r>
+              <a:rPr lang="en-US" altLang="zh-TW" sz="2400" dirty="0" err="1"/>
+              <a:t>accumulatedPenaltyPool</a:t>
+            </a:r>
+            <a:r>
+              <a:rPr lang="en-US" altLang="zh-TW" sz="2400" dirty="0"/>
+              <a:t>`</a:t>
+            </a:r>
+            <a:r>
+              <a:rPr lang="zh-TW" altLang="en-US" sz="2400" dirty="0"/>
+              <a:t>（分紅池）：用來動態記錄和儲存所有「未滿 </a:t>
+            </a:r>
+            <a:r>
+              <a:rPr lang="en-US" altLang="zh-TW" sz="2400" dirty="0"/>
+              <a:t>3 </a:t>
+            </a:r>
+            <a:r>
+              <a:rPr lang="zh-TW" altLang="en-US" sz="2400" dirty="0"/>
+              <a:t>天提款者」被扣除的 </a:t>
+            </a:r>
+            <a:r>
+              <a:rPr lang="en-US" altLang="zh-TW" sz="2400" dirty="0"/>
+              <a:t>5% </a:t>
+            </a:r>
+            <a:r>
+              <a:rPr lang="zh-TW" altLang="en-US" sz="2400" dirty="0"/>
+              <a:t>罰款總額。</a:t>
+            </a:r>
+          </a:p>
+          <a:p>
+            <a:r>
+              <a:rPr lang="en-US" altLang="zh-TW" sz="2400" dirty="0"/>
+              <a:t>`</a:t>
+            </a:r>
+            <a:r>
+              <a:rPr lang="en-US" altLang="zh-TW" sz="2400" dirty="0" err="1"/>
+              <a:t>UserInfo</a:t>
+            </a:r>
+            <a:r>
+              <a:rPr lang="en-US" altLang="zh-TW" sz="2400" dirty="0"/>
+              <a:t>`</a:t>
+            </a:r>
+            <a:r>
+              <a:rPr lang="zh-TW" altLang="en-US" sz="2400" dirty="0"/>
+              <a:t>（用戶帳本）：精準記錄每位用戶當前的份額餘額（</a:t>
+            </a:r>
+            <a:r>
+              <a:rPr lang="en-US" altLang="zh-TW" sz="2400" dirty="0"/>
+              <a:t>shares</a:t>
+            </a:r>
+            <a:r>
+              <a:rPr lang="zh-TW" altLang="en-US" sz="2400" dirty="0"/>
+              <a:t>）以及最後一次存款的虛擬時間戳記（</a:t>
+            </a:r>
+            <a:r>
+              <a:rPr lang="en-US" altLang="zh-TW" sz="2400" dirty="0" err="1"/>
+              <a:t>depositTimestamp</a:t>
+            </a:r>
+            <a:r>
+              <a:rPr lang="zh-TW" altLang="en-US" sz="2400" dirty="0"/>
+              <a:t>）。</a:t>
+            </a:r>
+          </a:p>
+        </p:txBody>
+      </p:sp>
+    </p:spTree>
+    <p:extLst>
+      <p:ext uri="{BB962C8B-B14F-4D97-AF65-F5344CB8AC3E}">
+        <p14:creationId xmlns:p14="http://schemas.microsoft.com/office/powerpoint/2010/main" val="988598342"/>
+      </p:ext>
+    </p:extLst>
+  </p:cSld>
+  <p:clrMapOvr>
+    <a:masterClrMapping/>
+  </p:clrMapOvr>
+</p:sld>
+</file>
+
+<file path=ppt/slides/slide5.xml><?xml version="1.0" encoding="utf-8"?>
+<p:sld xmlns:a="http://schemas.openxmlformats.org/drawingml/2006/main" xmlns:r="http://schemas.openxmlformats.org/officeDocument/2006/relationships" xmlns:p="http://schemas.openxmlformats.org/presentationml/2006/main">
+  <p:cSld>
+    <p:spTree>
+      <p:nvGrpSpPr>
+        <p:cNvPr id="1" name="">
+          <a:extLst>
+            <a:ext uri="{FF2B5EF4-FFF2-40B4-BE49-F238E27FC236}">
+              <a16:creationId xmlns:a16="http://schemas.microsoft.com/office/drawing/2014/main" id="{5AE857BB-C1E2-F3C8-9A59-D946B16A2A89}"/>
+            </a:ext>
+          </a:extLst>
+        </p:cNvPr>
+        <p:cNvGrpSpPr/>
+        <p:nvPr/>
+      </p:nvGrpSpPr>
+      <p:grpSpPr>
+        <a:xfrm>
+          <a:off x="0" y="0"/>
+          <a:ext cx="0" cy="0"/>
+          <a:chOff x="0" y="0"/>
+          <a:chExt cx="0" cy="0"/>
+        </a:xfrm>
+      </p:grpSpPr>
+      <p:sp>
+        <p:nvSpPr>
+          <p:cNvPr id="2" name="標題 1">
+            <a:extLst>
+              <a:ext uri="{FF2B5EF4-FFF2-40B4-BE49-F238E27FC236}">
+                <a16:creationId xmlns:a16="http://schemas.microsoft.com/office/drawing/2014/main" id="{BFB74DD6-CEF7-B413-6C08-755DE9368FBC}"/>
+              </a:ext>
+            </a:extLst>
+          </p:cNvPr>
+          <p:cNvSpPr>
+            <a:spLocks noGrp="1"/>
+          </p:cNvSpPr>
+          <p:nvPr>
+            <p:ph type="title"/>
+          </p:nvPr>
+        </p:nvSpPr>
+        <p:spPr/>
+        <p:txBody>
+          <a:bodyPr/>
+          <a:lstStyle/>
+          <a:p>
+            <a:r>
+              <a:rPr kumimoji="1" lang="en-US" altLang="zh-TW" dirty="0"/>
+              <a:t>The function of smart contract cont.</a:t>
+            </a:r>
+            <a:endParaRPr kumimoji="1" lang="zh-TW" altLang="en-US" dirty="0"/>
+          </a:p>
+        </p:txBody>
+      </p:sp>
+      <p:sp>
+        <p:nvSpPr>
+          <p:cNvPr id="3" name="內容版面配置區 2">
+            <a:extLst>
+              <a:ext uri="{FF2B5EF4-FFF2-40B4-BE49-F238E27FC236}">
+                <a16:creationId xmlns:a16="http://schemas.microsoft.com/office/drawing/2014/main" id="{A198A663-B094-8B15-7AEF-D60674562499}"/>
+              </a:ext>
+            </a:extLst>
+          </p:cNvPr>
+          <p:cNvSpPr>
+            <a:spLocks noGrp="1"/>
+          </p:cNvSpPr>
+          <p:nvPr>
+            <p:ph idx="1"/>
+          </p:nvPr>
+        </p:nvSpPr>
+        <p:spPr>
+          <a:xfrm>
+            <a:off x="838200" y="1701212"/>
+            <a:ext cx="10515600" cy="4433777"/>
+          </a:xfrm>
+        </p:spPr>
+        <p:txBody>
+          <a:bodyPr>
+            <a:noAutofit/>
+          </a:bodyPr>
+          <a:lstStyle/>
+          <a:p>
+            <a:r>
+              <a:rPr lang="en-US" altLang="zh-TW" sz="2000" dirty="0"/>
+              <a:t>`</a:t>
+            </a:r>
+            <a:r>
+              <a:rPr lang="zh-TW" altLang="zh-TW" sz="2000" dirty="0"/>
+              <a:t>setMarketPrice(uint256 _newPrice)</a:t>
+            </a:r>
+            <a:r>
+              <a:rPr lang="en-US" altLang="zh-TW" sz="2000" dirty="0"/>
+              <a:t>`</a:t>
+            </a:r>
+            <a:r>
+              <a:rPr lang="zh-TW" altLang="en-US" sz="2000" dirty="0"/>
+              <a:t>模擬設定市場價格，及狀態</a:t>
+            </a:r>
+            <a:r>
+              <a:rPr lang="en-US" altLang="zh-TW" sz="2000" dirty="0"/>
+              <a:t>BULL / BEAR / FLASH_CRASH</a:t>
+            </a:r>
+            <a:r>
+              <a:rPr lang="zh-TW" altLang="en-US" sz="2000" dirty="0"/>
+              <a:t>，僅限</a:t>
+            </a:r>
+            <a:r>
+              <a:rPr lang="en-US" altLang="zh-TW" sz="2000" dirty="0"/>
+              <a:t>admin</a:t>
+            </a:r>
+            <a:r>
+              <a:rPr lang="zh-TW" altLang="en-US" sz="2000" dirty="0"/>
+              <a:t>。</a:t>
+            </a:r>
+            <a:endParaRPr lang="en-US" altLang="zh-TW" sz="2000" dirty="0"/>
+          </a:p>
+          <a:p>
+            <a:r>
+              <a:rPr lang="en-US" altLang="zh-TW" sz="2000" dirty="0"/>
+              <a:t>`</a:t>
+            </a:r>
+            <a:r>
+              <a:rPr lang="zh-TW" altLang="zh-TW" sz="2000" dirty="0"/>
+              <a:t>deposit()</a:t>
+            </a:r>
+            <a:r>
+              <a:rPr lang="en-US" altLang="zh-TW" sz="2000" dirty="0"/>
+              <a:t>`</a:t>
+            </a:r>
+            <a:r>
+              <a:rPr lang="zh-TW" altLang="en-US" sz="2000" dirty="0"/>
+              <a:t>存款：非崩盤下</a:t>
+            </a:r>
+            <a:r>
+              <a:rPr lang="en-US" altLang="zh-TW" sz="2000" dirty="0"/>
+              <a:t> (</a:t>
+            </a:r>
+            <a:r>
+              <a:rPr lang="en-US" altLang="zh-TW" sz="2000" dirty="0" err="1"/>
+              <a:t>whenNotCrashed</a:t>
+            </a:r>
+            <a:r>
+              <a:rPr lang="en-US" altLang="zh-TW" sz="2000" dirty="0"/>
+              <a:t>) </a:t>
+            </a:r>
+            <a:r>
+              <a:rPr lang="zh-TW" altLang="en-US" sz="2000" dirty="0"/>
+              <a:t>才能使用。</a:t>
+            </a:r>
+            <a:endParaRPr lang="en-US" altLang="zh-TW" sz="2000" dirty="0"/>
+          </a:p>
+          <a:p>
+            <a:pPr lvl="1"/>
+            <a:r>
+              <a:rPr lang="zh-TW" altLang="en-US" sz="2000" dirty="0"/>
+              <a:t>牛市（</a:t>
+            </a:r>
+            <a:r>
+              <a:rPr lang="en-US" altLang="zh-TW" sz="2000" dirty="0"/>
+              <a:t>BULL</a:t>
+            </a:r>
+            <a:r>
+              <a:rPr lang="zh-TW" altLang="en-US" sz="2000" dirty="0"/>
+              <a:t>）：按 </a:t>
+            </a:r>
+            <a:r>
+              <a:rPr lang="en-US" altLang="zh-TW" sz="2000" dirty="0"/>
+              <a:t>100% </a:t>
+            </a:r>
+            <a:r>
+              <a:rPr lang="zh-TW" altLang="en-US" sz="2000" dirty="0"/>
+              <a:t>比例足額發行。存入 </a:t>
+            </a:r>
+            <a:r>
+              <a:rPr lang="en-US" altLang="zh-TW" sz="2000" dirty="0"/>
+              <a:t>1 ETH </a:t>
+            </a:r>
+            <a:r>
+              <a:rPr lang="zh-TW" altLang="en-US" sz="2000" dirty="0"/>
+              <a:t>獲得 </a:t>
+            </a:r>
+            <a:r>
+              <a:rPr lang="en-US" altLang="zh-TW" sz="2000" dirty="0"/>
+              <a:t>1 </a:t>
+            </a:r>
+            <a:r>
+              <a:rPr lang="zh-TW" altLang="en-US" sz="2000" dirty="0"/>
+              <a:t>份額。</a:t>
+            </a:r>
+          </a:p>
+          <a:p>
+            <a:pPr lvl="1"/>
+            <a:r>
+              <a:rPr lang="zh-TW" altLang="en-US" sz="2000" dirty="0"/>
+              <a:t>熊市（</a:t>
+            </a:r>
+            <a:r>
+              <a:rPr lang="en-US" altLang="zh-TW" sz="2000" dirty="0"/>
+              <a:t>BEAR</a:t>
+            </a:r>
+            <a:r>
+              <a:rPr lang="zh-TW" altLang="en-US" sz="2000" dirty="0"/>
+              <a:t>）：按 </a:t>
+            </a:r>
+            <a:r>
+              <a:rPr lang="en-US" altLang="zh-TW" sz="2000" dirty="0"/>
+              <a:t>80% </a:t>
+            </a:r>
+            <a:r>
+              <a:rPr lang="zh-TW" altLang="en-US" sz="2000" dirty="0"/>
+              <a:t>比例保守發行。存入 </a:t>
+            </a:r>
+            <a:r>
+              <a:rPr lang="en-US" altLang="zh-TW" sz="2000" dirty="0"/>
+              <a:t>1 ETH </a:t>
+            </a:r>
+            <a:r>
+              <a:rPr lang="zh-TW" altLang="en-US" sz="2000" dirty="0"/>
+              <a:t>僅獲得 </a:t>
+            </a:r>
+            <a:r>
+              <a:rPr lang="en-US" altLang="zh-TW" sz="2000" dirty="0"/>
+              <a:t>0.8 </a:t>
+            </a:r>
+            <a:r>
+              <a:rPr lang="zh-TW" altLang="en-US" sz="2000" dirty="0"/>
+              <a:t>份額。剩餘的 </a:t>
+            </a:r>
+            <a:r>
+              <a:rPr lang="en-US" altLang="zh-TW" sz="2000" dirty="0"/>
+              <a:t>20% </a:t>
+            </a:r>
+            <a:r>
+              <a:rPr lang="zh-TW" altLang="en-US" sz="2000" dirty="0"/>
+              <a:t>資金安全地留存在合約總資產（</a:t>
+            </a:r>
+            <a:r>
+              <a:rPr lang="en-US" altLang="zh-TW" sz="2000" dirty="0"/>
+              <a:t>address(this).balance</a:t>
+            </a:r>
+            <a:r>
+              <a:rPr lang="zh-TW" altLang="en-US" sz="2000" dirty="0"/>
+              <a:t>）中作為流動性緩衝金。</a:t>
+            </a:r>
+            <a:endParaRPr lang="en-US" altLang="zh-TW" sz="2000" dirty="0"/>
+          </a:p>
+          <a:p>
+            <a:r>
+              <a:rPr lang="en-US" altLang="zh-TW" sz="2000" dirty="0"/>
+              <a:t>`</a:t>
+            </a:r>
+            <a:r>
+              <a:rPr lang="zh-TW" altLang="zh-TW" sz="2000" dirty="0"/>
+              <a:t>withdraw(uint256 _sharesToWithdraw)</a:t>
+            </a:r>
+            <a:r>
+              <a:rPr lang="en-US" altLang="zh-TW" sz="2000" dirty="0"/>
+              <a:t>`</a:t>
+            </a:r>
+            <a:r>
+              <a:rPr lang="zh-TW" altLang="en-US" sz="2000" dirty="0"/>
+              <a:t>提款：非崩盤下</a:t>
+            </a:r>
+            <a:r>
+              <a:rPr lang="en-US" altLang="zh-TW" sz="2000" dirty="0"/>
+              <a:t> (</a:t>
+            </a:r>
+            <a:r>
+              <a:rPr lang="en-US" altLang="zh-TW" sz="2000" dirty="0" err="1"/>
+              <a:t>whenNotCrashed</a:t>
+            </a:r>
+            <a:r>
+              <a:rPr lang="en-US" altLang="zh-TW" sz="2000" dirty="0"/>
+              <a:t>) </a:t>
+            </a:r>
+            <a:r>
+              <a:rPr lang="zh-TW" altLang="en-US" sz="2000" dirty="0"/>
+              <a:t>才能使用。</a:t>
+            </a:r>
+            <a:endParaRPr lang="en-US" altLang="zh-TW" sz="2000" dirty="0"/>
+          </a:p>
+          <a:p>
+            <a:pPr lvl="1"/>
+            <a:r>
+              <a:rPr lang="zh-TW" altLang="en-US" sz="2000" dirty="0"/>
+              <a:t>未滿 </a:t>
+            </a:r>
+            <a:r>
+              <a:rPr lang="en-US" altLang="zh-TW" sz="2000" dirty="0"/>
+              <a:t>3 </a:t>
+            </a:r>
+            <a:r>
+              <a:rPr lang="zh-TW" altLang="en-US" sz="2000" dirty="0"/>
+              <a:t>天（閃電提領）：合約判定用戶缺乏耐心，會針對本次提領的數量強制扣除 </a:t>
+            </a:r>
+            <a:r>
+              <a:rPr lang="en-US" altLang="zh-TW" sz="2000" dirty="0"/>
+              <a:t>5% </a:t>
+            </a:r>
+            <a:r>
+              <a:rPr lang="zh-TW" altLang="en-US" sz="2000" dirty="0"/>
+              <a:t>罰款（</a:t>
+            </a:r>
+            <a:r>
+              <a:rPr lang="en-US" altLang="zh-TW" sz="2000" dirty="0"/>
+              <a:t>penalty</a:t>
+            </a:r>
+            <a:r>
+              <a:rPr lang="zh-TW" altLang="en-US" sz="2000" dirty="0"/>
+              <a:t>），並直接記錄累加進 </a:t>
+            </a:r>
+            <a:r>
+              <a:rPr lang="en-US" altLang="zh-TW" sz="2000" dirty="0" err="1"/>
+              <a:t>accumulatedPenaltyPool</a:t>
+            </a:r>
+            <a:r>
+              <a:rPr lang="zh-TW" altLang="en-US" sz="2000" dirty="0"/>
+              <a:t>（分紅池）。</a:t>
+            </a:r>
+          </a:p>
+          <a:p>
+            <a:pPr lvl="1"/>
+            <a:r>
+              <a:rPr lang="zh-TW" altLang="en-US" sz="2000" dirty="0"/>
+              <a:t>滿 </a:t>
+            </a:r>
+            <a:r>
+              <a:rPr lang="en-US" altLang="zh-TW" sz="2000" dirty="0"/>
+              <a:t>3 </a:t>
+            </a:r>
+            <a:r>
+              <a:rPr lang="zh-TW" altLang="en-US" sz="2000" dirty="0"/>
+              <a:t>天以上（長期持有）：享有 </a:t>
+            </a:r>
+            <a:r>
+              <a:rPr lang="en-US" altLang="zh-TW" sz="2000" dirty="0"/>
+              <a:t>0 </a:t>
+            </a:r>
+            <a:r>
+              <a:rPr lang="zh-TW" altLang="en-US" sz="2000" dirty="0"/>
+              <a:t>手續費福利，且能按本次提領份額佔全場的比例，精準瓜分當前分紅池裡的獎勵（</a:t>
+            </a:r>
+            <a:r>
+              <a:rPr lang="en-US" altLang="zh-TW" sz="2000" dirty="0"/>
+              <a:t>bonus</a:t>
+            </a:r>
+            <a:r>
+              <a:rPr lang="zh-TW" altLang="en-US" sz="2000" dirty="0"/>
+              <a:t>）。</a:t>
+            </a:r>
+          </a:p>
+          <a:p>
+            <a:pPr lvl="1"/>
+            <a:r>
+              <a:rPr lang="zh-TW" altLang="en-US" sz="2000" dirty="0"/>
+              <a:t>記帳變動：</a:t>
+            </a:r>
+            <a:r>
+              <a:rPr lang="en-US" altLang="zh-TW" sz="2000" dirty="0" err="1"/>
+              <a:t>totalVaultShares</a:t>
+            </a:r>
+            <a:r>
+              <a:rPr lang="zh-TW" altLang="en-US" sz="2000" dirty="0"/>
+              <a:t>（全站總份額）與用戶的 </a:t>
+            </a:r>
+            <a:r>
+              <a:rPr lang="en-US" altLang="zh-TW" sz="2000" dirty="0" err="1"/>
+              <a:t>user.shares</a:t>
+            </a:r>
+            <a:r>
+              <a:rPr lang="en-US" altLang="zh-TW" sz="2000" dirty="0"/>
+              <a:t> </a:t>
+            </a:r>
+            <a:r>
+              <a:rPr lang="zh-TW" altLang="en-US" sz="2000" dirty="0"/>
+              <a:t>僅扣除本次提領的部分，其餘資產繼續留在合約中增值。</a:t>
+            </a:r>
+          </a:p>
+          <a:p>
+            <a:pPr lvl="1"/>
+            <a:endParaRPr lang="en-US" altLang="zh-TW" sz="2000" dirty="0"/>
+          </a:p>
+          <a:p>
+            <a:endParaRPr lang="zh-TW" altLang="en-US" sz="2000" dirty="0"/>
+          </a:p>
+        </p:txBody>
+      </p:sp>
+    </p:spTree>
+    <p:extLst>
+      <p:ext uri="{BB962C8B-B14F-4D97-AF65-F5344CB8AC3E}">
+        <p14:creationId xmlns:p14="http://schemas.microsoft.com/office/powerpoint/2010/main" val="1046615704"/>
+      </p:ext>
+    </p:extLst>
+  </p:cSld>
+  <p:clrMapOvr>
+    <a:masterClrMapping/>
+  </p:clrMapOvr>
+</p:sld>
+</file>
+
+<file path=ppt/slides/slide6.xml><?xml version="1.0" encoding="utf-8"?>
+<p:sld xmlns:a="http://schemas.openxmlformats.org/drawingml/2006/main" xmlns:r="http://schemas.openxmlformats.org/officeDocument/2006/relationships" xmlns:p="http://schemas.openxmlformats.org/presentationml/2006/main">
+  <p:cSld>
+    <p:spTree>
+      <p:nvGrpSpPr>
+        <p:cNvPr id="1" name=""/>
+        <p:cNvGrpSpPr/>
+        <p:nvPr/>
+      </p:nvGrpSpPr>
+      <p:grpSpPr>
+        <a:xfrm>
+          <a:off x="0" y="0"/>
+          <a:ext cx="0" cy="0"/>
+          <a:chOff x="0" y="0"/>
+          <a:chExt cx="0" cy="0"/>
+        </a:xfrm>
+      </p:grpSpPr>
+      <p:sp>
+        <p:nvSpPr>
+          <p:cNvPr id="3" name="內容版面配置區 2">
+            <a:extLst>
+              <a:ext uri="{FF2B5EF4-FFF2-40B4-BE49-F238E27FC236}">
+                <a16:creationId xmlns:a16="http://schemas.microsoft.com/office/drawing/2014/main" id="{1B57A46B-A9BA-2685-C473-C6BE0E5CEA24}"/>
+              </a:ext>
+            </a:extLst>
+          </p:cNvPr>
+          <p:cNvSpPr>
+            <a:spLocks noGrp="1"/>
+          </p:cNvSpPr>
+          <p:nvPr>
+            <p:ph idx="1"/>
+          </p:nvPr>
+        </p:nvSpPr>
+        <p:spPr/>
+        <p:txBody>
+          <a:bodyPr/>
+          <a:lstStyle/>
+          <a:p>
+            <a:r>
+              <a:rPr lang="zh-TW" altLang="zh-TW" dirty="0"/>
+              <a:t>emergencyRefund()</a:t>
+            </a:r>
+            <a:r>
+              <a:rPr lang="zh-TW" altLang="en-US" dirty="0"/>
+              <a:t> </a:t>
+            </a:r>
+            <a:r>
+              <a:rPr lang="zh-TW" altLang="zh-TW" dirty="0"/>
+              <a:t>緊急保本退款通道</a:t>
+            </a:r>
+            <a:r>
+              <a:rPr lang="zh-TW" altLang="en-US" dirty="0"/>
+              <a:t>：狀態處於</a:t>
+            </a:r>
+            <a:r>
+              <a:rPr lang="en-US" altLang="zh-TW" dirty="0"/>
+              <a:t>`</a:t>
+            </a:r>
+            <a:r>
+              <a:rPr lang="zh-TW" altLang="zh-TW" dirty="0"/>
+              <a:t>FLASH_CRASH</a:t>
+            </a:r>
+            <a:r>
+              <a:rPr lang="en-US" altLang="zh-TW" dirty="0"/>
+              <a:t>` </a:t>
+            </a:r>
+            <a:r>
+              <a:rPr lang="zh-TW" altLang="en-US" dirty="0"/>
+              <a:t>才會出現。讓所有人可以無視 </a:t>
+            </a:r>
+            <a:r>
+              <a:rPr lang="en-US" altLang="zh-TW" dirty="0"/>
+              <a:t>3 </a:t>
+            </a:r>
+            <a:r>
+              <a:rPr lang="zh-TW" altLang="en-US" dirty="0"/>
+              <a:t>天時間鎖，無條件、零手續費地將當前剩餘的所有份額（</a:t>
+            </a:r>
+            <a:r>
+              <a:rPr lang="en-US" altLang="zh-TW" dirty="0"/>
+              <a:t>100% </a:t>
+            </a:r>
+            <a:r>
+              <a:rPr lang="zh-TW" altLang="en-US" dirty="0"/>
+              <a:t>原始本金）安全撤離。</a:t>
+            </a:r>
+            <a:endParaRPr lang="en-US" altLang="zh-TW" dirty="0"/>
+          </a:p>
+          <a:p>
+            <a:r>
+              <a:rPr lang="en-US" altLang="zh-TW" dirty="0"/>
+              <a:t>`</a:t>
+            </a:r>
+            <a:r>
+              <a:rPr lang="zh-TW" altLang="zh-TW" dirty="0"/>
+              <a:t>cheatForwardTime(uint256 _seconds)</a:t>
+            </a:r>
+            <a:r>
+              <a:rPr lang="en-US" altLang="zh-TW" dirty="0"/>
+              <a:t>`</a:t>
+            </a:r>
+            <a:r>
+              <a:rPr lang="zh-TW" altLang="en-US" dirty="0"/>
+              <a:t> 測試用時間調整器：</a:t>
+            </a:r>
+            <a:r>
+              <a:rPr lang="zh-TW" altLang="zh-TW" dirty="0"/>
+              <a:t>僅限管理員</a:t>
+            </a:r>
+            <a:r>
+              <a:rPr lang="zh-TW" altLang="en-US" dirty="0"/>
+              <a:t>。</a:t>
+            </a:r>
+            <a:r>
+              <a:rPr lang="zh-TW" altLang="zh-TW" dirty="0"/>
+              <a:t>當調用此函數時（例如快進 4 天），合約內部所有的時間戳計算（getVirtualTimestamp()）都會自動往後飛躍 4 天。</a:t>
+            </a:r>
+            <a:endParaRPr lang="en-US" altLang="zh-TW" dirty="0"/>
+          </a:p>
+        </p:txBody>
+      </p:sp>
+      <p:sp>
+        <p:nvSpPr>
+          <p:cNvPr id="4" name="標題 1">
+            <a:extLst>
+              <a:ext uri="{FF2B5EF4-FFF2-40B4-BE49-F238E27FC236}">
+                <a16:creationId xmlns:a16="http://schemas.microsoft.com/office/drawing/2014/main" id="{54FA854E-DFA6-67F5-4009-50D761A942A0}"/>
+              </a:ext>
+            </a:extLst>
+          </p:cNvPr>
+          <p:cNvSpPr>
+            <a:spLocks noGrp="1"/>
+          </p:cNvSpPr>
+          <p:nvPr>
+            <p:ph type="title"/>
+          </p:nvPr>
+        </p:nvSpPr>
+        <p:spPr/>
+        <p:txBody>
+          <a:bodyPr/>
+          <a:lstStyle/>
+          <a:p>
+            <a:r>
+              <a:rPr kumimoji="1" lang="en-US" altLang="zh-TW" dirty="0"/>
+              <a:t>The function of smart contract cont.</a:t>
+            </a:r>
+            <a:endParaRPr kumimoji="1" lang="zh-TW" altLang="en-US" dirty="0"/>
+          </a:p>
+        </p:txBody>
+      </p:sp>
+    </p:spTree>
+    <p:extLst>
+      <p:ext uri="{BB962C8B-B14F-4D97-AF65-F5344CB8AC3E}">
+        <p14:creationId xmlns:p14="http://schemas.microsoft.com/office/powerpoint/2010/main" val="2401622741"/>
+      </p:ext>
+    </p:extLst>
+  </p:cSld>
+  <p:clrMapOvr>
+    <a:masterClrMapping/>
+  </p:clrMapOvr>
+</p:sld>
+</file>
+
+<file path=ppt/slides/slide7.xml><?xml version="1.0" encoding="utf-8"?>
+<p:sld xmlns:a="http://schemas.openxmlformats.org/drawingml/2006/main" xmlns:r="http://schemas.openxmlformats.org/officeDocument/2006/relationships" xmlns:p="http://schemas.openxmlformats.org/presentationml/2006/main">
+  <p:cSld>
+    <p:spTree>
+      <p:nvGrpSpPr>
+        <p:cNvPr id="1" name=""/>
+        <p:cNvGrpSpPr/>
+        <p:nvPr/>
+      </p:nvGrpSpPr>
+      <p:grpSpPr>
+        <a:xfrm>
+          <a:off x="0" y="0"/>
+          <a:ext cx="0" cy="0"/>
+          <a:chOff x="0" y="0"/>
+          <a:chExt cx="0" cy="0"/>
+        </a:xfrm>
+      </p:grpSpPr>
+      <p:sp>
+        <p:nvSpPr>
+          <p:cNvPr id="2" name="標題 1">
+            <a:extLst>
+              <a:ext uri="{FF2B5EF4-FFF2-40B4-BE49-F238E27FC236}">
+                <a16:creationId xmlns:a16="http://schemas.microsoft.com/office/drawing/2014/main" id="{38EC0F07-6265-35E4-7979-2FBC5FD26B87}"/>
+              </a:ext>
+            </a:extLst>
+          </p:cNvPr>
+          <p:cNvSpPr>
+            <a:spLocks noGrp="1"/>
+          </p:cNvSpPr>
+          <p:nvPr>
+            <p:ph type="title"/>
+          </p:nvPr>
+        </p:nvSpPr>
+        <p:spPr/>
+        <p:txBody>
+          <a:bodyPr/>
+          <a:lstStyle/>
+          <a:p>
+            <a:r>
+              <a:rPr kumimoji="1" lang="en-US" altLang="zh-TW" dirty="0"/>
+              <a:t>Snapshot of all step: Set market state</a:t>
+            </a:r>
+            <a:endParaRPr kumimoji="1" lang="zh-TW" altLang="en-US" dirty="0"/>
+          </a:p>
+        </p:txBody>
+      </p:sp>
+      <p:sp>
+        <p:nvSpPr>
+          <p:cNvPr id="3" name="內容版面配置區 2">
+            <a:extLst>
+              <a:ext uri="{FF2B5EF4-FFF2-40B4-BE49-F238E27FC236}">
+                <a16:creationId xmlns:a16="http://schemas.microsoft.com/office/drawing/2014/main" id="{FD302B27-99B4-ED70-C286-8157930286A6}"/>
+              </a:ext>
+            </a:extLst>
+          </p:cNvPr>
+          <p:cNvSpPr>
+            <a:spLocks noGrp="1"/>
+          </p:cNvSpPr>
+          <p:nvPr>
+            <p:ph idx="1"/>
+          </p:nvPr>
+        </p:nvSpPr>
+        <p:spPr>
+          <a:xfrm>
+            <a:off x="838200" y="1485383"/>
+            <a:ext cx="10515600" cy="4351338"/>
+          </a:xfrm>
+        </p:spPr>
+        <p:txBody>
+          <a:bodyPr/>
+          <a:lstStyle/>
+          <a:p>
+            <a:r>
+              <a:rPr kumimoji="1" lang="en-US" altLang="zh-TW" dirty="0"/>
+              <a:t>BULL</a:t>
+            </a:r>
+          </a:p>
+          <a:p>
+            <a:endParaRPr kumimoji="1" lang="zh-TW" altLang="en-US" dirty="0"/>
+          </a:p>
+        </p:txBody>
+      </p:sp>
+      <p:pic>
+        <p:nvPicPr>
+          <p:cNvPr id="5" name="圖片 4">
+            <a:extLst>
+              <a:ext uri="{FF2B5EF4-FFF2-40B4-BE49-F238E27FC236}">
+                <a16:creationId xmlns:a16="http://schemas.microsoft.com/office/drawing/2014/main" id="{99E2DC60-33B6-E28A-16FA-9E3C19D56708}"/>
+              </a:ext>
+            </a:extLst>
+          </p:cNvPr>
+          <p:cNvPicPr>
+            <a:picLocks noChangeAspect="1"/>
+          </p:cNvPicPr>
+          <p:nvPr/>
+        </p:nvPicPr>
+        <p:blipFill>
+          <a:blip r:embed="rId2"/>
+          <a:stretch>
+            <a:fillRect/>
+          </a:stretch>
+        </p:blipFill>
+        <p:spPr>
+          <a:xfrm>
+            <a:off x="1105787" y="1982356"/>
+            <a:ext cx="8559208" cy="4692845"/>
+          </a:xfrm>
+          <a:prstGeom prst="rect">
+            <a:avLst/>
+          </a:prstGeom>
+        </p:spPr>
+      </p:pic>
+    </p:spTree>
+    <p:extLst>
+      <p:ext uri="{BB962C8B-B14F-4D97-AF65-F5344CB8AC3E}">
+        <p14:creationId xmlns:p14="http://schemas.microsoft.com/office/powerpoint/2010/main" val="648808259"/>
+      </p:ext>
+    </p:extLst>
+  </p:cSld>
+  <p:clrMapOvr>
+    <a:masterClrMapping/>
+  </p:clrMapOvr>
+</p:sld>
+</file>
+
+<file path=ppt/slides/slide8.xml><?xml version="1.0" encoding="utf-8"?>
+<p:sld xmlns:a="http://schemas.openxmlformats.org/drawingml/2006/main" xmlns:r="http://schemas.openxmlformats.org/officeDocument/2006/relationships" xmlns:p="http://schemas.openxmlformats.org/presentationml/2006/main">
+  <p:cSld>
+    <p:spTree>
+      <p:nvGrpSpPr>
+        <p:cNvPr id="1" name="">
+          <a:extLst>
+            <a:ext uri="{FF2B5EF4-FFF2-40B4-BE49-F238E27FC236}">
+              <a16:creationId xmlns:a16="http://schemas.microsoft.com/office/drawing/2014/main" id="{056F5891-488F-AA6D-0620-A93AD6F88614}"/>
+            </a:ext>
+          </a:extLst>
+        </p:cNvPr>
+        <p:cNvGrpSpPr/>
+        <p:nvPr/>
+      </p:nvGrpSpPr>
+      <p:grpSpPr>
+        <a:xfrm>
+          <a:off x="0" y="0"/>
+          <a:ext cx="0" cy="0"/>
+          <a:chOff x="0" y="0"/>
+          <a:chExt cx="0" cy="0"/>
+        </a:xfrm>
+      </p:grpSpPr>
+      <p:sp>
+        <p:nvSpPr>
+          <p:cNvPr id="2" name="標題 1">
+            <a:extLst>
+              <a:ext uri="{FF2B5EF4-FFF2-40B4-BE49-F238E27FC236}">
+                <a16:creationId xmlns:a16="http://schemas.microsoft.com/office/drawing/2014/main" id="{8402432D-2686-EF27-747F-CCFD8CE754E0}"/>
+              </a:ext>
+            </a:extLst>
+          </p:cNvPr>
+          <p:cNvSpPr>
+            <a:spLocks noGrp="1"/>
+          </p:cNvSpPr>
+          <p:nvPr>
+            <p:ph type="title"/>
+          </p:nvPr>
+        </p:nvSpPr>
+        <p:spPr/>
+        <p:txBody>
+          <a:bodyPr/>
+          <a:lstStyle/>
+          <a:p>
+            <a:r>
+              <a:rPr kumimoji="1" lang="en-US" altLang="zh-TW" dirty="0"/>
+              <a:t>Snapshot of all step: Set market state cont.</a:t>
+            </a:r>
+            <a:endParaRPr kumimoji="1" lang="zh-TW" altLang="en-US" dirty="0"/>
+          </a:p>
+        </p:txBody>
+      </p:sp>
+      <p:sp>
+        <p:nvSpPr>
+          <p:cNvPr id="3" name="內容版面配置區 2">
+            <a:extLst>
+              <a:ext uri="{FF2B5EF4-FFF2-40B4-BE49-F238E27FC236}">
+                <a16:creationId xmlns:a16="http://schemas.microsoft.com/office/drawing/2014/main" id="{E6331B04-B193-1D09-7905-92539E7C5B05}"/>
+              </a:ext>
+            </a:extLst>
+          </p:cNvPr>
+          <p:cNvSpPr>
+            <a:spLocks noGrp="1"/>
+          </p:cNvSpPr>
+          <p:nvPr>
+            <p:ph idx="1"/>
+          </p:nvPr>
+        </p:nvSpPr>
+        <p:spPr>
+          <a:xfrm>
+            <a:off x="838200" y="1485383"/>
+            <a:ext cx="10515600" cy="4351338"/>
+          </a:xfrm>
+        </p:spPr>
+        <p:txBody>
+          <a:bodyPr/>
+          <a:lstStyle/>
+          <a:p>
+            <a:r>
+              <a:rPr kumimoji="1" lang="en-US" altLang="zh-TW" dirty="0"/>
+              <a:t>BEAR</a:t>
+            </a:r>
+          </a:p>
+          <a:p>
+            <a:endParaRPr kumimoji="1" lang="zh-TW" altLang="en-US" dirty="0"/>
+          </a:p>
+        </p:txBody>
+      </p:sp>
+      <p:pic>
+        <p:nvPicPr>
+          <p:cNvPr id="6" name="圖片 5">
+            <a:extLst>
+              <a:ext uri="{FF2B5EF4-FFF2-40B4-BE49-F238E27FC236}">
+                <a16:creationId xmlns:a16="http://schemas.microsoft.com/office/drawing/2014/main" id="{589E6BBD-B73E-6EF5-BE88-9DB15E275CA7}"/>
+              </a:ext>
+            </a:extLst>
+          </p:cNvPr>
+          <p:cNvPicPr>
+            <a:picLocks noChangeAspect="1"/>
+          </p:cNvPicPr>
+          <p:nvPr/>
+        </p:nvPicPr>
+        <p:blipFill>
+          <a:blip r:embed="rId2"/>
+          <a:stretch>
+            <a:fillRect/>
+          </a:stretch>
+        </p:blipFill>
+        <p:spPr>
+          <a:xfrm>
+            <a:off x="1095153" y="1962410"/>
+            <a:ext cx="8495414" cy="4635394"/>
+          </a:xfrm>
+          <a:prstGeom prst="rect">
+            <a:avLst/>
+          </a:prstGeom>
+        </p:spPr>
+      </p:pic>
+    </p:spTree>
+    <p:extLst>
+      <p:ext uri="{BB962C8B-B14F-4D97-AF65-F5344CB8AC3E}">
+        <p14:creationId xmlns:p14="http://schemas.microsoft.com/office/powerpoint/2010/main" val="3765004579"/>
+      </p:ext>
+    </p:extLst>
+  </p:cSld>
+  <p:clrMapOvr>
+    <a:masterClrMapping/>
+  </p:clrMapOvr>
+</p:sld>
+</file>
+
+<file path=ppt/slides/slide9.xml><?xml version="1.0" encoding="utf-8"?>
+<p:sld xmlns:a="http://schemas.openxmlformats.org/drawingml/2006/main" xmlns:r="http://schemas.openxmlformats.org/officeDocument/2006/relationships" xmlns:p="http://schemas.openxmlformats.org/presentationml/2006/main">
+  <p:cSld>
+    <p:spTree>
+      <p:nvGrpSpPr>
+        <p:cNvPr id="1" name="">
+          <a:extLst>
+            <a:ext uri="{FF2B5EF4-FFF2-40B4-BE49-F238E27FC236}">
+              <a16:creationId xmlns:a16="http://schemas.microsoft.com/office/drawing/2014/main" id="{34252189-AF22-AD22-49E6-6755852586FB}"/>
+            </a:ext>
+          </a:extLst>
+        </p:cNvPr>
+        <p:cNvGrpSpPr/>
+        <p:nvPr/>
+      </p:nvGrpSpPr>
+      <p:grpSpPr>
+        <a:xfrm>
+          <a:off x="0" y="0"/>
+          <a:ext cx="0" cy="0"/>
+          <a:chOff x="0" y="0"/>
+          <a:chExt cx="0" cy="0"/>
+        </a:xfrm>
+      </p:grpSpPr>
+      <p:sp>
+        <p:nvSpPr>
+          <p:cNvPr id="2" name="標題 1">
+            <a:extLst>
+              <a:ext uri="{FF2B5EF4-FFF2-40B4-BE49-F238E27FC236}">
+                <a16:creationId xmlns:a16="http://schemas.microsoft.com/office/drawing/2014/main" id="{7B76DFF3-82FC-CC93-0B53-0B71A8621523}"/>
+              </a:ext>
+            </a:extLst>
+          </p:cNvPr>
+          <p:cNvSpPr>
+            <a:spLocks noGrp="1"/>
+          </p:cNvSpPr>
+          <p:nvPr>
+            <p:ph type="title"/>
+          </p:nvPr>
+        </p:nvSpPr>
+        <p:spPr/>
+        <p:txBody>
+          <a:bodyPr/>
+          <a:lstStyle/>
+          <a:p>
+            <a:r>
+              <a:rPr kumimoji="1" lang="en-US" altLang="zh-TW" dirty="0"/>
+              <a:t>Snapshot of all step: Set market state cont.</a:t>
+            </a:r>
+            <a:endParaRPr kumimoji="1" lang="zh-TW" altLang="en-US" dirty="0"/>
+          </a:p>
+        </p:txBody>
+      </p:sp>
+      <p:sp>
+        <p:nvSpPr>
+          <p:cNvPr id="3" name="內容版面配置區 2">
+            <a:extLst>
+              <a:ext uri="{FF2B5EF4-FFF2-40B4-BE49-F238E27FC236}">
+                <a16:creationId xmlns:a16="http://schemas.microsoft.com/office/drawing/2014/main" id="{2C8371FB-8831-FA02-4C1E-12D036C3E0C5}"/>
+              </a:ext>
+            </a:extLst>
+          </p:cNvPr>
+          <p:cNvSpPr>
+            <a:spLocks noGrp="1"/>
+          </p:cNvSpPr>
+          <p:nvPr>
+            <p:ph idx="1"/>
+          </p:nvPr>
+        </p:nvSpPr>
+        <p:spPr>
+          <a:xfrm>
+            <a:off x="838200" y="1485383"/>
+            <a:ext cx="10515600" cy="4351338"/>
+          </a:xfrm>
+        </p:spPr>
+        <p:txBody>
+          <a:bodyPr/>
+          <a:lstStyle/>
+          <a:p>
+            <a:r>
+              <a:rPr kumimoji="1" lang="en-US" altLang="zh-TW" dirty="0"/>
+              <a:t>FLASH_CRASH &amp; </a:t>
+            </a:r>
+            <a:r>
+              <a:rPr kumimoji="1" lang="zh-TW" altLang="en-US" dirty="0"/>
+              <a:t>緊急保本退款</a:t>
+            </a:r>
+            <a:endParaRPr kumimoji="1" lang="en-US" altLang="zh-TW" dirty="0"/>
+          </a:p>
+          <a:p>
+            <a:endParaRPr kumimoji="1" lang="zh-TW" altLang="en-US" dirty="0"/>
+          </a:p>
+        </p:txBody>
+      </p:sp>
+      <p:pic>
+        <p:nvPicPr>
+          <p:cNvPr id="5" name="圖片 4">
+            <a:extLst>
+              <a:ext uri="{FF2B5EF4-FFF2-40B4-BE49-F238E27FC236}">
+                <a16:creationId xmlns:a16="http://schemas.microsoft.com/office/drawing/2014/main" id="{4F6E55D7-B5F9-FC64-3053-7F1B078D24D6}"/>
+              </a:ext>
+            </a:extLst>
+          </p:cNvPr>
+          <p:cNvPicPr>
+            <a:picLocks noChangeAspect="1"/>
+          </p:cNvPicPr>
+          <p:nvPr/>
+        </p:nvPicPr>
+        <p:blipFill>
+          <a:blip r:embed="rId2"/>
+          <a:stretch>
+            <a:fillRect/>
+          </a:stretch>
+        </p:blipFill>
+        <p:spPr>
+          <a:xfrm>
+            <a:off x="1041990" y="1964973"/>
+            <a:ext cx="8729331" cy="4786121"/>
+          </a:xfrm>
+          <a:prstGeom prst="rect">
+            <a:avLst/>
+          </a:prstGeom>
+        </p:spPr>
+      </p:pic>
+    </p:spTree>
+    <p:extLst>
+      <p:ext uri="{BB962C8B-B14F-4D97-AF65-F5344CB8AC3E}">
+        <p14:creationId xmlns:p14="http://schemas.microsoft.com/office/powerpoint/2010/main" val="2278822630"/>
       </p:ext>
     </p:extLst>
   </p:cSld>
